--- a/curso/pptx/S44.pptx
+++ b/curso/pptx/S44.pptx
@@ -3892,8 +3892,8 @@
         </p:nvSpPr>
         <p:spPr>
           <a:xfrm>
-            <a:off x="640000" y="420000"/>
-            <a:ext cx="10912000" cy="420000"/>
+            <a:off x="10652000" y="380000"/>
+            <a:ext cx="900000" cy="800000"/>
           </a:xfrm>
           <a:prstGeom prst="rect">
             <a:avLst/>
@@ -3908,17 +3908,17 @@
           <a:p>
             <a:pPr>
               <a:spcAft>
-                <a:spcPts val="810"/>
+                <a:spcPts val="1980"/>
               </a:spcAft>
             </a:pPr>
             <a:r>
-              <a:rPr sz="1800" b="1">
+              <a:rPr sz="4400" b="0">
                 <a:solidFill>
                   <a:srgbClr val="1F2A44"/>
                 </a:solidFill>
                 <a:latin typeface="Nunito Sans"/>
               </a:rPr>
-              <a:t>🦉 Aula de Filosofía</a:t>
+              <a:t>🙃</a:t>
             </a:r>
           </a:p>
         </p:txBody>

--- a/curso/pptx/S44.pptx
+++ b/curso/pptx/S44.pptx
@@ -4139,7 +4139,7 @@
                 </a:solidFill>
                 <a:latin typeface="Fredoka"/>
               </a:rPr>
-              <a:t>Caso 1 · El número de la suerte</a:t>
+              <a:t>Caso 1 · El ladrón de hachas</a:t>
             </a:r>
           </a:p>
         </p:txBody>
@@ -4221,7 +4221,7 @@
                 </a:solidFill>
                 <a:latin typeface="Nunito Sans"/>
               </a:rPr>
-              <a:t>Maialen juega con el 7 en todo. «Siempre me trae suerte: el sábado gané con él a las cartas».</a:t>
+              <a:t>Un cuento antiguo de China: un campesino pierde su hacha y sospecha del hijo del vecino. Todo lo que hace el chico le parece «de ladrón». Luego encuentra el hacha en su leña.</a:t>
             </a:r>
           </a:p>
         </p:txBody>
@@ -4269,7 +4269,7 @@
                 </a:solidFill>
                 <a:latin typeface="Nunito Sans"/>
               </a:rPr>
-              <a:t>¿De qué se acuerda? De las veces que ganó con el 7.</a:t>
+              <a:t>¿Qué cree el campesino? Que el chico le ha robado el hacha.</a:t>
             </a:r>
           </a:p>
           <a:p>
@@ -4294,7 +4294,7 @@
                 </a:solidFill>
                 <a:latin typeface="Nunito Sans"/>
               </a:rPr>
-              <a:t>¿Y de las que perdió? No las cuenta: no confirman su idea.</a:t>
+              <a:t>Por eso interpreta todo a favor de su idea: caminar deprisa, sonreír o callarse le parece «de ladrón».</a:t>
             </a:r>
           </a:p>
           <a:p>
@@ -4319,7 +4319,7 @@
                 </a:solidFill>
                 <a:latin typeface="Nunito Sans"/>
               </a:rPr>
-              <a:t>Para saberlo tendría que apuntar todas las partidas, las buenas y las malas.</a:t>
+              <a:t>Encuentra el hacha en su propio montón de leña… y el chico vuelve a parecerle normal.</a:t>
             </a:r>
           </a:p>
           <a:p>
@@ -4344,7 +4344,7 @@
                 </a:solidFill>
                 <a:latin typeface="Nunito Sans"/>
               </a:rPr>
-              <a:t>Conclusión: sesgo de confirmación. Solo recuerda los aciertos.</a:t>
+              <a:t>Conclusión: sesgo de confirmación. El chico no cambió: cambió la mirada del campesino.</a:t>
             </a:r>
           </a:p>
         </p:txBody>
@@ -7205,7 +7205,7 @@
                 </a:solidFill>
                 <a:latin typeface="Nunito Sans"/>
               </a:rPr>
-              <a:t>Maialen cree que el número 7 le da suerte. Se acuerda de todas las veces que ganó con él.</a:t>
+              <a:t>Un campesino pierde su hacha y sospecha del hijo del vecino. Desde entonces, el chico camina, habla y sonríe «como un ladrón».</a:t>
             </a:r>
           </a:p>
         </p:txBody>
@@ -7244,7 +7244,7 @@
                 </a:solidFill>
                 <a:latin typeface="Nunito Sans"/>
               </a:rPr>
-              <a:t>¿Y las veces que perdió? ¿Se acordará de ellas?</a:t>
+              <a:t>¿Ha cambiado el chico? ¿O ha cambiado otra cosa?</a:t>
             </a:r>
           </a:p>
         </p:txBody>

--- a/curso/pptx/S44.pptx
+++ b/curso/pptx/S44.pptx
@@ -473,426 +473,6 @@
     </a:lvl9pPr>
   </p:notesStyle>
 </p:notesMaster>
-</file>
-
-<file path=ppt/notesSlides/notesSlide1.xml><?xml version="1.0" encoding="utf-8"?>
-<p:notes xmlns:a="http://schemas.openxmlformats.org/drawingml/2006/main" xmlns:p="http://schemas.openxmlformats.org/presentationml/2006/main" xmlns:r="http://schemas.openxmlformats.org/officeDocument/2006/relationships">
-  <p:cSld>
-    <p:spTree>
-      <p:nvGrpSpPr>
-        <p:cNvPr id="1" name=""/>
-        <p:cNvGrpSpPr/>
-        <p:nvPr/>
-      </p:nvGrpSpPr>
-      <p:grpSpPr>
-        <a:xfrm>
-          <a:off x="0" y="0"/>
-          <a:ext cx="0" cy="0"/>
-          <a:chOff x="0" y="0"/>
-          <a:chExt cx="0" cy="0"/>
-        </a:xfrm>
-      </p:grpSpPr>
-      <p:sp>
-        <p:nvSpPr>
-          <p:cNvPr id="2" name="Slide Image Placeholder 1"/>
-          <p:cNvSpPr>
-            <a:spLocks noGrp="1"/>
-          </p:cNvSpPr>
-          <p:nvPr>
-            <p:ph type="sldImg" idx="2"/>
-          </p:nvPr>
-        </p:nvSpPr>
-        <p:spPr/>
-      </p:sp>
-      <p:sp>
-        <p:nvSpPr>
-          <p:cNvPr id="3" name="Notes Placeholder 2"/>
-          <p:cNvSpPr>
-            <a:spLocks noGrp="1"/>
-          </p:cNvSpPr>
-          <p:nvPr>
-            <p:ph type="body" idx="3" sz="quarter"/>
-          </p:nvPr>
-        </p:nvSpPr>
-        <p:spPr/>
-        <p:txBody>
-          <a:bodyPr/>
-          <a:lstStyle/>
-          <a:p>
-            <a:r>
-              <a:t>3 minutos. Sin apuntes. Es para recordar, no cuenta para nota.</a:t>
-            </a:r>
-          </a:p>
-        </p:txBody>
-      </p:sp>
-      <p:sp>
-        <p:nvSpPr>
-          <p:cNvPr id="4" name="Slide Number Placeholder 3"/>
-          <p:cNvSpPr>
-            <a:spLocks noGrp="1"/>
-          </p:cNvSpPr>
-          <p:nvPr>
-            <p:ph type="sldNum" idx="5" sz="quarter"/>
-          </p:nvPr>
-        </p:nvSpPr>
-        <p:spPr/>
-      </p:sp>
-    </p:spTree>
-  </p:cSld>
-  <p:clrMapOvr>
-    <a:masterClrMapping/>
-  </p:clrMapOvr>
-</p:notes>
-</file>
-
-<file path=ppt/notesSlides/notesSlide2.xml><?xml version="1.0" encoding="utf-8"?>
-<p:notes xmlns:a="http://schemas.openxmlformats.org/drawingml/2006/main" xmlns:p="http://schemas.openxmlformats.org/presentationml/2006/main" xmlns:r="http://schemas.openxmlformats.org/officeDocument/2006/relationships">
-  <p:cSld>
-    <p:spTree>
-      <p:nvGrpSpPr>
-        <p:cNvPr id="1" name=""/>
-        <p:cNvGrpSpPr/>
-        <p:nvPr/>
-      </p:nvGrpSpPr>
-      <p:grpSpPr>
-        <a:xfrm>
-          <a:off x="0" y="0"/>
-          <a:ext cx="0" cy="0"/>
-          <a:chOff x="0" y="0"/>
-          <a:chExt cx="0" cy="0"/>
-        </a:xfrm>
-      </p:grpSpPr>
-      <p:sp>
-        <p:nvSpPr>
-          <p:cNvPr id="2" name="Slide Image Placeholder 1"/>
-          <p:cNvSpPr>
-            <a:spLocks noGrp="1"/>
-          </p:cNvSpPr>
-          <p:nvPr>
-            <p:ph type="sldImg" idx="2"/>
-          </p:nvPr>
-        </p:nvSpPr>
-        <p:spPr/>
-      </p:sp>
-      <p:sp>
-        <p:nvSpPr>
-          <p:cNvPr id="3" name="Notes Placeholder 2"/>
-          <p:cNvSpPr>
-            <a:spLocks noGrp="1"/>
-          </p:cNvSpPr>
-          <p:nvPr>
-            <p:ph type="body" idx="3" sz="quarter"/>
-          </p:nvPr>
-        </p:nvSpPr>
-        <p:spPr/>
-        <p:txBody>
-          <a:bodyPr/>
-          <a:lstStyle/>
-          <a:p>
-            <a:r>
-              <a:t>3 minutos. Sin apuntes. Es para recordar, no cuenta para nota.</a:t>
-            </a:r>
-          </a:p>
-        </p:txBody>
-      </p:sp>
-      <p:sp>
-        <p:nvSpPr>
-          <p:cNvPr id="4" name="Slide Number Placeholder 3"/>
-          <p:cNvSpPr>
-            <a:spLocks noGrp="1"/>
-          </p:cNvSpPr>
-          <p:nvPr>
-            <p:ph type="sldNum" idx="5" sz="quarter"/>
-          </p:nvPr>
-        </p:nvSpPr>
-        <p:spPr/>
-      </p:sp>
-    </p:spTree>
-  </p:cSld>
-  <p:clrMapOvr>
-    <a:masterClrMapping/>
-  </p:clrMapOvr>
-</p:notes>
-</file>
-
-<file path=ppt/notesSlides/notesSlide3.xml><?xml version="1.0" encoding="utf-8"?>
-<p:notes xmlns:a="http://schemas.openxmlformats.org/drawingml/2006/main" xmlns:p="http://schemas.openxmlformats.org/presentationml/2006/main" xmlns:r="http://schemas.openxmlformats.org/officeDocument/2006/relationships">
-  <p:cSld>
-    <p:spTree>
-      <p:nvGrpSpPr>
-        <p:cNvPr id="1" name=""/>
-        <p:cNvGrpSpPr/>
-        <p:nvPr/>
-      </p:nvGrpSpPr>
-      <p:grpSpPr>
-        <a:xfrm>
-          <a:off x="0" y="0"/>
-          <a:ext cx="0" cy="0"/>
-          <a:chOff x="0" y="0"/>
-          <a:chExt cx="0" cy="0"/>
-        </a:xfrm>
-      </p:grpSpPr>
-      <p:sp>
-        <p:nvSpPr>
-          <p:cNvPr id="2" name="Slide Image Placeholder 1"/>
-          <p:cNvSpPr>
-            <a:spLocks noGrp="1"/>
-          </p:cNvSpPr>
-          <p:nvPr>
-            <p:ph type="sldImg" idx="2"/>
-          </p:nvPr>
-        </p:nvSpPr>
-        <p:spPr/>
-      </p:sp>
-      <p:sp>
-        <p:nvSpPr>
-          <p:cNvPr id="3" name="Notes Placeholder 2"/>
-          <p:cNvSpPr>
-            <a:spLocks noGrp="1"/>
-          </p:cNvSpPr>
-          <p:nvPr>
-            <p:ph type="body" idx="3" sz="quarter"/>
-          </p:nvPr>
-        </p:nvSpPr>
-        <p:spPr/>
-        <p:txBody>
-          <a:bodyPr/>
-          <a:lstStyle/>
-          <a:p>
-            <a:r>
-              <a:t>Nadie tiene que contestar: solo pensarlo.</a:t>
-            </a:r>
-          </a:p>
-        </p:txBody>
-      </p:sp>
-      <p:sp>
-        <p:nvSpPr>
-          <p:cNvPr id="4" name="Slide Number Placeholder 3"/>
-          <p:cNvSpPr>
-            <a:spLocks noGrp="1"/>
-          </p:cNvSpPr>
-          <p:nvPr>
-            <p:ph type="sldNum" idx="5" sz="quarter"/>
-          </p:nvPr>
-        </p:nvSpPr>
-        <p:spPr/>
-      </p:sp>
-    </p:spTree>
-  </p:cSld>
-  <p:clrMapOvr>
-    <a:masterClrMapping/>
-  </p:clrMapOvr>
-</p:notes>
-</file>
-
-<file path=ppt/notesSlides/notesSlide4.xml><?xml version="1.0" encoding="utf-8"?>
-<p:notes xmlns:a="http://schemas.openxmlformats.org/drawingml/2006/main" xmlns:p="http://schemas.openxmlformats.org/presentationml/2006/main" xmlns:r="http://schemas.openxmlformats.org/officeDocument/2006/relationships">
-  <p:cSld>
-    <p:spTree>
-      <p:nvGrpSpPr>
-        <p:cNvPr id="1" name=""/>
-        <p:cNvGrpSpPr/>
-        <p:nvPr/>
-      </p:nvGrpSpPr>
-      <p:grpSpPr>
-        <a:xfrm>
-          <a:off x="0" y="0"/>
-          <a:ext cx="0" cy="0"/>
-          <a:chOff x="0" y="0"/>
-          <a:chExt cx="0" cy="0"/>
-        </a:xfrm>
-      </p:grpSpPr>
-      <p:sp>
-        <p:nvSpPr>
-          <p:cNvPr id="2" name="Slide Image Placeholder 1"/>
-          <p:cNvSpPr>
-            <a:spLocks noGrp="1"/>
-          </p:cNvSpPr>
-          <p:nvPr>
-            <p:ph type="sldImg" idx="2"/>
-          </p:nvPr>
-        </p:nvSpPr>
-        <p:spPr/>
-      </p:sp>
-      <p:sp>
-        <p:nvSpPr>
-          <p:cNvPr id="3" name="Notes Placeholder 2"/>
-          <p:cNvSpPr>
-            <a:spLocks noGrp="1"/>
-          </p:cNvSpPr>
-          <p:nvPr>
-            <p:ph type="body" idx="3" sz="quarter"/>
-          </p:nvPr>
-        </p:nvSpPr>
-        <p:spPr/>
-        <p:txBody>
-          <a:bodyPr/>
-          <a:lstStyle/>
-          <a:p>
-            <a:r>
-              <a:t>Dejar unos segundos para que piensen la respuesta fácil antes de enseñar los pasos.</a:t>
-            </a:r>
-          </a:p>
-        </p:txBody>
-      </p:sp>
-      <p:sp>
-        <p:nvSpPr>
-          <p:cNvPr id="4" name="Slide Number Placeholder 3"/>
-          <p:cNvSpPr>
-            <a:spLocks noGrp="1"/>
-          </p:cNvSpPr>
-          <p:nvPr>
-            <p:ph type="sldNum" idx="5" sz="quarter"/>
-          </p:nvPr>
-        </p:nvSpPr>
-        <p:spPr/>
-      </p:sp>
-    </p:spTree>
-  </p:cSld>
-  <p:clrMapOvr>
-    <a:masterClrMapping/>
-  </p:clrMapOvr>
-</p:notes>
-</file>
-
-<file path=ppt/notesSlides/notesSlide5.xml><?xml version="1.0" encoding="utf-8"?>
-<p:notes xmlns:a="http://schemas.openxmlformats.org/drawingml/2006/main" xmlns:p="http://schemas.openxmlformats.org/presentationml/2006/main" xmlns:r="http://schemas.openxmlformats.org/officeDocument/2006/relationships">
-  <p:cSld>
-    <p:spTree>
-      <p:nvGrpSpPr>
-        <p:cNvPr id="1" name=""/>
-        <p:cNvGrpSpPr/>
-        <p:nvPr/>
-      </p:nvGrpSpPr>
-      <p:grpSpPr>
-        <a:xfrm>
-          <a:off x="0" y="0"/>
-          <a:ext cx="0" cy="0"/>
-          <a:chOff x="0" y="0"/>
-          <a:chExt cx="0" cy="0"/>
-        </a:xfrm>
-      </p:grpSpPr>
-      <p:sp>
-        <p:nvSpPr>
-          <p:cNvPr id="2" name="Slide Image Placeholder 1"/>
-          <p:cNvSpPr>
-            <a:spLocks noGrp="1"/>
-          </p:cNvSpPr>
-          <p:nvPr>
-            <p:ph type="sldImg" idx="2"/>
-          </p:nvPr>
-        </p:nvSpPr>
-        <p:spPr/>
-      </p:sp>
-      <p:sp>
-        <p:nvSpPr>
-          <p:cNvPr id="3" name="Notes Placeholder 2"/>
-          <p:cNvSpPr>
-            <a:spLocks noGrp="1"/>
-          </p:cNvSpPr>
-          <p:nvPr>
-            <p:ph type="body" idx="3" sz="quarter"/>
-          </p:nvPr>
-        </p:nvSpPr>
-        <p:spPr/>
-        <p:txBody>
-          <a:bodyPr/>
-          <a:lstStyle/>
-          <a:p>
-            <a:r>
-              <a:t>Dejar 2 minutos para que lo escriban. La diapositiva siguiente muestra el resumen.</a:t>
-            </a:r>
-          </a:p>
-        </p:txBody>
-      </p:sp>
-      <p:sp>
-        <p:nvSpPr>
-          <p:cNvPr id="4" name="Slide Number Placeholder 3"/>
-          <p:cNvSpPr>
-            <a:spLocks noGrp="1"/>
-          </p:cNvSpPr>
-          <p:nvPr>
-            <p:ph type="sldNum" idx="5" sz="quarter"/>
-          </p:nvPr>
-        </p:nvSpPr>
-        <p:spPr/>
-      </p:sp>
-    </p:spTree>
-  </p:cSld>
-  <p:clrMapOvr>
-    <a:masterClrMapping/>
-  </p:clrMapOvr>
-</p:notes>
-</file>
-
-<file path=ppt/notesSlides/notesSlide6.xml><?xml version="1.0" encoding="utf-8"?>
-<p:notes xmlns:a="http://schemas.openxmlformats.org/drawingml/2006/main" xmlns:p="http://schemas.openxmlformats.org/presentationml/2006/main" xmlns:r="http://schemas.openxmlformats.org/officeDocument/2006/relationships">
-  <p:cSld>
-    <p:spTree>
-      <p:nvGrpSpPr>
-        <p:cNvPr id="1" name=""/>
-        <p:cNvGrpSpPr/>
-        <p:nvPr/>
-      </p:nvGrpSpPr>
-      <p:grpSpPr>
-        <a:xfrm>
-          <a:off x="0" y="0"/>
-          <a:ext cx="0" cy="0"/>
-          <a:chOff x="0" y="0"/>
-          <a:chExt cx="0" cy="0"/>
-        </a:xfrm>
-      </p:grpSpPr>
-      <p:sp>
-        <p:nvSpPr>
-          <p:cNvPr id="2" name="Slide Image Placeholder 1"/>
-          <p:cNvSpPr>
-            <a:spLocks noGrp="1"/>
-          </p:cNvSpPr>
-          <p:nvPr>
-            <p:ph type="sldImg" idx="2"/>
-          </p:nvPr>
-        </p:nvSpPr>
-        <p:spPr/>
-      </p:sp>
-      <p:sp>
-        <p:nvSpPr>
-          <p:cNvPr id="3" name="Notes Placeholder 2"/>
-          <p:cNvSpPr>
-            <a:spLocks noGrp="1"/>
-          </p:cNvSpPr>
-          <p:nvPr>
-            <p:ph type="body" idx="3" sz="quarter"/>
-          </p:nvPr>
-        </p:nvSpPr>
-        <p:spPr/>
-        <p:txBody>
-          <a:bodyPr/>
-          <a:lstStyle/>
-          <a:p>
-            <a:r>
-              <a:t>Buscar: «sesgo de confirmación explicado» · «tarea 2 4 6 Wason»</a:t>
-            </a:r>
-          </a:p>
-        </p:txBody>
-      </p:sp>
-      <p:sp>
-        <p:nvSpPr>
-          <p:cNvPr id="4" name="Slide Number Placeholder 3"/>
-          <p:cNvSpPr>
-            <a:spLocks noGrp="1"/>
-          </p:cNvSpPr>
-          <p:nvPr>
-            <p:ph type="sldNum" idx="5" sz="quarter"/>
-          </p:nvPr>
-        </p:nvSpPr>
-        <p:spPr/>
-      </p:sp>
-    </p:spTree>
-  </p:cSld>
-  <p:clrMapOvr>
-    <a:masterClrMapping/>
-  </p:clrMapOvr>
-</p:notes>
 </file>
 
 <file path=ppt/slideLayouts/slideLayout1.xml><?xml version="1.0" encoding="utf-8"?>

--- a/curso/pptx/S44.pptx
+++ b/curso/pptx/S44.pptx
@@ -4110,7 +4110,7 @@
                 </a:solidFill>
                 <a:latin typeface="Nunito Sans"/>
               </a:rPr>
-              <a:t>Dylan cree que las bebidas energéticas le ayudan a estudiar. Busca: «beneficios de las bebidas energéticas para estudiar».</a:t>
+              <a:t>Un chico cree que las bebidas energéticas le ayudan a estudiar. Busca: «beneficios de las bebidas energéticas para estudiar».</a:t>
             </a:r>
           </a:p>
         </p:txBody>
@@ -4728,7 +4728,7 @@
                 </a:solidFill>
                 <a:latin typeface="Nunito Sans"/>
               </a:rPr>
-              <a:t>Iker cree que fumar es malo para la salud. Ve un vídeo, sin ninguna fuente, que dice lo contrario. No le hace caso.</a:t>
+              <a:t>Un chico cree que fumar es malo para la salud. Ve un vídeo, sin ninguna fuente, que dice lo contrario. No le hace caso.</a:t>
             </a:r>
           </a:p>
         </p:txBody>

--- a/curso/pptx/S44.pptx
+++ b/curso/pptx/S44.pptx
@@ -22,8 +22,6 @@
     <p:sldId id="270" r:id="rId22"/>
     <p:sldId id="271" r:id="rId23"/>
     <p:sldId id="272" r:id="rId24"/>
-    <p:sldId id="273" r:id="rId25"/>
-    <p:sldId id="274" r:id="rId26"/>
   </p:sldIdLst>
   <p:sldSz cx="12192000" cy="6858000" type="screen4x3"/>
   <p:notesSz cx="6858000" cy="9144000"/>
@@ -3576,7 +3574,7 @@
                 </a:solidFill>
                 <a:latin typeface="Fredoka"/>
               </a:rPr>
-              <a:t>Sesgo de confirmación</a:t>
+              <a:t>¿Qué es un sesgo cognitivo?</a:t>
             </a:r>
           </a:p>
         </p:txBody>
@@ -3615,7 +3613,7 @@
                 </a:solidFill>
                 <a:latin typeface="Nunito Sans"/>
               </a:rPr>
-              <a:t>El sesgo de confirmación es buscar, recordar y creer solo lo que nos da la razón, y olvidar lo que nos la quita.</a:t>
+              <a:t>Un sesgo cognitivo es un error que se repite de forma predecible. Suele venir de atajos mentales que casi siempre nos ayudan.</a:t>
             </a:r>
           </a:p>
         </p:txBody>
@@ -3634,7 +3632,7 @@
     <p:bg>
       <p:bgPr>
         <a:solidFill>
-          <a:srgbClr val="FBF7EF"/>
+          <a:srgbClr val="1F2A44"/>
         </a:solidFill>
         <a:effectLst/>
       </p:bgPr>
@@ -3654,8 +3652,8 @@
         </p:nvSpPr>
         <p:spPr>
           <a:xfrm>
-            <a:off x="640000" y="380000"/>
-            <a:ext cx="10912000" cy="420000"/>
+            <a:off x="640000" y="2300000"/>
+            <a:ext cx="10912000" cy="500000"/>
           </a:xfrm>
           <a:prstGeom prst="rect">
             <a:avLst/>
@@ -3670,17 +3668,17 @@
           <a:p>
             <a:pPr>
               <a:spcAft>
-                <a:spcPts val="630"/>
-              </a:spcAft>
-            </a:pPr>
-            <a:r>
-              <a:rPr sz="1400" b="1">
-                <a:solidFill>
-                  <a:srgbClr val="E8793A"/>
-                </a:solidFill>
-                <a:latin typeface="Nunito Sans"/>
-              </a:rPr>
-              <a:t>BLOQUE 2 · CASOS RESUELTOS</a:t>
+                <a:spcPts val="810"/>
+              </a:spcAft>
+            </a:pPr>
+            <a:r>
+              <a:rPr sz="1800" b="1">
+                <a:solidFill>
+                  <a:srgbClr val="F4B183"/>
+                </a:solidFill>
+                <a:latin typeface="Nunito Sans"/>
+              </a:rPr>
+              <a:t>BLOQUE 2</a:t>
             </a:r>
           </a:p>
         </p:txBody>
@@ -3693,7 +3691,7 @@
         </p:nvSpPr>
         <p:spPr>
           <a:xfrm>
-            <a:off x="640000" y="760000"/>
+            <a:off x="640000" y="2800000"/>
             <a:ext cx="10912000" cy="800000"/>
           </a:xfrm>
           <a:prstGeom prst="rect">
@@ -3709,222 +3707,17 @@
           <a:p>
             <a:pPr>
               <a:spcAft>
-                <a:spcPts val="1710"/>
-              </a:spcAft>
-            </a:pPr>
-            <a:r>
-              <a:rPr sz="3800" b="1">
-                <a:solidFill>
-                  <a:srgbClr val="1F2A44"/>
+                <a:spcPts val="2160"/>
+              </a:spcAft>
+            </a:pPr>
+            <a:r>
+              <a:rPr sz="4800" b="1">
+                <a:solidFill>
+                  <a:srgbClr val="FBF7EF"/>
                 </a:solidFill>
                 <a:latin typeface="Fredoka"/>
               </a:rPr>
-              <a:t>Caso 1 · El ladrón de hachas</a:t>
-            </a:r>
-          </a:p>
-        </p:txBody>
-      </p:sp>
-      <p:sp>
-        <p:nvSpPr>
-          <p:cNvPr id="4" name="Rectangle 3"/>
-          <p:cNvSpPr/>
-          <p:nvPr/>
-        </p:nvSpPr>
-        <p:spPr>
-          <a:xfrm>
-            <a:off x="640000" y="1600000"/>
-            <a:ext cx="10912000" cy="1100000"/>
-          </a:xfrm>
-          <a:prstGeom prst="rect">
-            <a:avLst/>
-          </a:prstGeom>
-          <a:solidFill>
-            <a:srgbClr val="FFFFFF"/>
-          </a:solidFill>
-          <a:ln>
-            <a:noFill/>
-          </a:ln>
-        </p:spPr>
-        <p:style>
-          <a:lnRef idx="1">
-            <a:schemeClr val="accent1"/>
-          </a:lnRef>
-          <a:fillRef idx="3">
-            <a:schemeClr val="accent1"/>
-          </a:fillRef>
-          <a:effectRef idx="2">
-            <a:schemeClr val="accent1"/>
-          </a:effectRef>
-          <a:fontRef idx="minor">
-            <a:schemeClr val="lt1"/>
-          </a:fontRef>
-        </p:style>
-        <p:txBody>
-          <a:bodyPr rtlCol="0" anchor="ctr"/>
-          <a:lstStyle/>
-          <a:p>
-            <a:pPr algn="ctr"/>
-          </a:p>
-        </p:txBody>
-      </p:sp>
-      <p:sp>
-        <p:nvSpPr>
-          <p:cNvPr id="5" name="TextBox 4"/>
-          <p:cNvSpPr txBox="1"/>
-          <p:nvPr/>
-        </p:nvSpPr>
-        <p:spPr>
-          <a:xfrm>
-            <a:off x="840000" y="1650000"/>
-            <a:ext cx="10512000" cy="1000000"/>
-          </a:xfrm>
-          <a:prstGeom prst="rect">
-            <a:avLst/>
-          </a:prstGeom>
-          <a:noFill/>
-        </p:spPr>
-        <p:txBody>
-          <a:bodyPr wrap="square" anchor="ctr">
-            <a:spAutoFit/>
-          </a:bodyPr>
-          <a:lstStyle/>
-          <a:p>
-            <a:pPr>
-              <a:spcAft>
-                <a:spcPts val="1170"/>
-              </a:spcAft>
-            </a:pPr>
-            <a:r>
-              <a:rPr sz="2600" b="1">
-                <a:solidFill>
-                  <a:srgbClr val="1F2A44"/>
-                </a:solidFill>
-                <a:latin typeface="Nunito Sans"/>
-              </a:rPr>
-              <a:t>Un cuento antiguo de China: un campesino pierde su hacha y sospecha del hijo del vecino. Todo lo que hace el chico le parece «de ladrón». Luego encuentra el hacha en su leña.</a:t>
-            </a:r>
-          </a:p>
-        </p:txBody>
-      </p:sp>
-      <p:sp>
-        <p:nvSpPr>
-          <p:cNvPr id="6" name="TextBox 5"/>
-          <p:cNvSpPr txBox="1"/>
-          <p:nvPr/>
-        </p:nvSpPr>
-        <p:spPr>
-          <a:xfrm>
-            <a:off x="640000" y="2900000"/>
-            <a:ext cx="10912000" cy="3500000"/>
-          </a:xfrm>
-          <a:prstGeom prst="rect">
-            <a:avLst/>
-          </a:prstGeom>
-          <a:noFill/>
-        </p:spPr>
-        <p:txBody>
-          <a:bodyPr wrap="square">
-            <a:spAutoFit/>
-          </a:bodyPr>
-          <a:lstStyle/>
-          <a:p>
-            <a:pPr>
-              <a:spcAft>
-                <a:spcPts val="1080"/>
-              </a:spcAft>
-            </a:pPr>
-            <a:r>
-              <a:rPr sz="2400" b="1">
-                <a:solidFill>
-                  <a:srgbClr val="E8793A"/>
-                </a:solidFill>
-                <a:latin typeface="Nunito Sans"/>
-              </a:rPr>
-              <a:t>1. </a:t>
-            </a:r>
-            <a:r>
-              <a:rPr sz="2400" b="0">
-                <a:solidFill>
-                  <a:srgbClr val="1F2A44"/>
-                </a:solidFill>
-                <a:latin typeface="Nunito Sans"/>
-              </a:rPr>
-              <a:t>¿Qué cree el campesino? Que el chico le ha robado el hacha.</a:t>
-            </a:r>
-          </a:p>
-          <a:p>
-            <a:pPr>
-              <a:spcAft>
-                <a:spcPts val="1080"/>
-              </a:spcAft>
-            </a:pPr>
-            <a:r>
-              <a:rPr sz="2400" b="1">
-                <a:solidFill>
-                  <a:srgbClr val="E8793A"/>
-                </a:solidFill>
-                <a:latin typeface="Nunito Sans"/>
-              </a:rPr>
-              <a:t>2. </a:t>
-            </a:r>
-            <a:r>
-              <a:rPr sz="2400" b="0">
-                <a:solidFill>
-                  <a:srgbClr val="1F2A44"/>
-                </a:solidFill>
-                <a:latin typeface="Nunito Sans"/>
-              </a:rPr>
-              <a:t>Por eso interpreta todo a favor de su idea: caminar deprisa, sonreír o callarse le parece «de ladrón».</a:t>
-            </a:r>
-          </a:p>
-          <a:p>
-            <a:pPr>
-              <a:spcAft>
-                <a:spcPts val="1080"/>
-              </a:spcAft>
-            </a:pPr>
-            <a:r>
-              <a:rPr sz="2400" b="1">
-                <a:solidFill>
-                  <a:srgbClr val="E8793A"/>
-                </a:solidFill>
-                <a:latin typeface="Nunito Sans"/>
-              </a:rPr>
-              <a:t>3. </a:t>
-            </a:r>
-            <a:r>
-              <a:rPr sz="2400" b="0">
-                <a:solidFill>
-                  <a:srgbClr val="1F2A44"/>
-                </a:solidFill>
-                <a:latin typeface="Nunito Sans"/>
-              </a:rPr>
-              <a:t>Encuentra el hacha en su propio montón de leña… y el chico vuelve a parecerle normal.</a:t>
-            </a:r>
-          </a:p>
-          <a:p>
-            <a:pPr>
-              <a:spcAft>
-                <a:spcPts val="1080"/>
-              </a:spcAft>
-            </a:pPr>
-            <a:r>
-              <a:rPr sz="2400" b="1">
-                <a:solidFill>
-                  <a:srgbClr val="E8793A"/>
-                </a:solidFill>
-                <a:latin typeface="Nunito Sans"/>
-              </a:rPr>
-              <a:t>4. </a:t>
-            </a:r>
-            <a:r>
-              <a:rPr sz="2400" b="0">
-                <a:solidFill>
-                  <a:srgbClr val="1F2A44"/>
-                </a:solidFill>
-                <a:latin typeface="Nunito Sans"/>
-              </a:rPr>
-              <a:t>Conclusión: sesgo de confirmación. El chico no cambió: cambió la mirada del campesino.</a:t>
+              <a:t>Casos resueltos</a:t>
             </a:r>
           </a:p>
         </p:txBody>
@@ -4028,7 +3821,7 @@
                 </a:solidFill>
                 <a:latin typeface="Fredoka"/>
               </a:rPr>
-              <a:t>Caso 2 · La búsqueda en internet</a:t>
+              <a:t>Caso 1 · El bate y la pelota</a:t>
             </a:r>
           </a:p>
         </p:txBody>
@@ -4110,7 +3903,7 @@
                 </a:solidFill>
                 <a:latin typeface="Nunito Sans"/>
               </a:rPr>
-              <a:t>Un chico cree que las bebidas energéticas le ayudan a estudiar. Busca: «beneficios de las bebidas energéticas para estudiar».</a:t>
+              <a:t>Un bate y una pelota cuestan 1,10 € en total. El bate cuesta 1 € más que la pelota. ¿Cuánto cuesta la pelota?</a:t>
             </a:r>
           </a:p>
         </p:txBody>
@@ -4158,7 +3951,7 @@
                 </a:solidFill>
                 <a:latin typeface="Nunito Sans"/>
               </a:rPr>
-              <a:t>La búsqueda ya lleva la respuesta: solo pide beneficios.</a:t>
+              <a:t>La respuesta rápida es 10 céntimos. Mucha gente la da, también estudiantes universitarios.</a:t>
             </a:r>
           </a:p>
           <a:p>
@@ -4183,7 +3976,7 @@
                 </a:solidFill>
                 <a:latin typeface="Nunito Sans"/>
               </a:rPr>
-              <a:t>Encontrará páginas que le dan la razón y se quedará tranquilo.</a:t>
+              <a:t>Compruebo despacio: si la pelota vale 0,10 €, el bate vale 1,10 €. Total: 1,20 €. ¡Falla!</a:t>
             </a:r>
           </a:p>
           <a:p>
@@ -4208,7 +4001,7 @@
                 </a:solidFill>
                 <a:latin typeface="Nunito Sans"/>
               </a:rPr>
-              <a:t>Una búsqueda más justa: «bebidas energéticas y estudio: ventajas y riesgos».</a:t>
+              <a:t>Si la pelota vale 0,05 €, el bate vale 1,05 €. Total: 1,10 €. Correcto.</a:t>
             </a:r>
           </a:p>
           <a:p>
@@ -4233,7 +4026,7 @@
                 </a:solidFill>
                 <a:latin typeface="Nunito Sans"/>
               </a:rPr>
-              <a:t>Conclusión: sesgo de confirmación al buscar. Hay que buscar también lo que me puede quitar la razón.</a:t>
+              <a:t>Conclusión: el atajo da una respuesta que «suena» bien. Pensar despacio la corrige.</a:t>
             </a:r>
           </a:p>
         </p:txBody>
@@ -4337,7 +4130,7 @@
                 </a:solidFill>
                 <a:latin typeface="Fredoka"/>
               </a:rPr>
-              <a:t>Caso 3 · La tarea 2-4-6</a:t>
+              <a:t>Caso 2 · ¿Qué es más peligroso?</a:t>
             </a:r>
           </a:p>
         </p:txBody>
@@ -4419,7 +4212,7 @@
                 </a:solidFill>
                 <a:latin typeface="Nunito Sans"/>
               </a:rPr>
-              <a:t>Experimento de Peter Wason (1960): «La serie 2-4-6 cumple una regla secreta. Propón otras series y te digo si la cumplen».</a:t>
+              <a:t>Un chico tiene miedo a los tiburones cuando se baña en el mar. En cambio, cruza la calle mirando el móvil sin preocuparse.</a:t>
             </a:r>
           </a:p>
         </p:txBody>
@@ -4467,7 +4260,7 @@
                 </a:solidFill>
                 <a:latin typeface="Nunito Sans"/>
               </a:rPr>
-              <a:t>Mucha gente prueba 8-10-12, 20-22-24… Todas cumplen. «¡La regla es sumar 2!».</a:t>
+              <a:t>Los ataques de tiburón salen mucho en películas y noticias: los recordamos fácil.</a:t>
             </a:r>
           </a:p>
           <a:p>
@@ -4492,7 +4285,7 @@
                 </a:solidFill>
                 <a:latin typeface="Nunito Sans"/>
               </a:rPr>
-              <a:t>Pero la regla era más sencilla: «tres números que van subiendo».</a:t>
+              <a:t>Los atropellos son muchísimo más frecuentes, pero casi no llaman la atención.</a:t>
             </a:r>
           </a:p>
           <a:p>
@@ -4517,7 +4310,7 @@
                 </a:solidFill>
                 <a:latin typeface="Nunito Sans"/>
               </a:rPr>
-              <a:t>Pocos probaron series que pudieran fallar, como 6-4-2 o 1-5-100.</a:t>
+              <a:t>Atajo: «si lo recuerdo fácil, pasa mucho». Aquí falla.</a:t>
             </a:r>
           </a:p>
           <a:p>
@@ -4542,7 +4335,25 @@
                 </a:solidFill>
                 <a:latin typeface="Nunito Sans"/>
               </a:rPr>
-              <a:t>Conclusión: buscamos ejemplos que confirman nuestra idea. Es mejor buscar contraejemplos, como en la sesión 11.</a:t>
+              <a:t>Conclusión: </a:t>
+            </a:r>
+            <a:r>
+              <a:rPr sz="2400" b="1">
+                <a:solidFill>
+                  <a:srgbClr val="1F2A44"/>
+                </a:solidFill>
+                <a:latin typeface="Nunito Sans"/>
+              </a:rPr>
+              <a:t>sesgo de disponibilidad</a:t>
+            </a:r>
+            <a:r>
+              <a:rPr sz="2400" b="0">
+                <a:solidFill>
+                  <a:srgbClr val="1F2A44"/>
+                </a:solidFill>
+                <a:latin typeface="Nunito Sans"/>
+              </a:rPr>
+              <a:t>. La mente juzga el peligro por lo que recuerda fácil, no por los datos.</a:t>
             </a:r>
           </a:p>
         </p:txBody>
@@ -4646,7 +4457,7 @@
                 </a:solidFill>
                 <a:latin typeface="Fredoka"/>
               </a:rPr>
-              <a:t>⚠ ¿Cerrado o bien informado?</a:t>
+              <a:t>⚠ ¿Atajo = sesgo?</a:t>
             </a:r>
           </a:p>
         </p:txBody>
@@ -4728,7 +4539,7 @@
                 </a:solidFill>
                 <a:latin typeface="Nunito Sans"/>
               </a:rPr>
-              <a:t>Un chico cree que fumar es malo para la salud. Ve un vídeo, sin ninguna fuente, que dice lo contrario. No le hace caso.</a:t>
+              <a:t>Un chico ve nubes negras sobre Bilbao y coge el paraguas. No ha mirado el tiempo en el móvil ni lo ha pensado despacio.</a:t>
             </a:r>
           </a:p>
         </p:txBody>
@@ -4776,7 +4587,7 @@
                 </a:solidFill>
                 <a:latin typeface="Nunito Sans"/>
               </a:rPr>
-              <a:t>Solo acepta lo que le da la razón… ¿es sesgo de confirmación?</a:t>
+              <a:t>Ha decidido rápido, con un atajo… ¿ha caído en un sesgo?</a:t>
             </a:r>
           </a:p>
           <a:p>
@@ -4801,7 +4612,7 @@
                 </a:solidFill>
                 <a:latin typeface="Nunito Sans"/>
               </a:rPr>
-              <a:t>Parece que sí: rechaza lo que le quita la razón.</a:t>
+              <a:t>Parece que sí: usó un atajo, «nubes negras = lluvia», sin pensar despacio.</a:t>
             </a:r>
           </a:p>
           <a:p>
@@ -4826,7 +4637,7 @@
                 </a:solidFill>
                 <a:latin typeface="Nunito Sans"/>
               </a:rPr>
-              <a:t>Pero mira las pruebas: su idea tiene miles de estudios detrás; el vídeo, ninguna fuente.</a:t>
+              <a:t>Pero ese atajo casi siempre acierta, y le ahorra tiempo.</a:t>
             </a:r>
           </a:p>
           <a:p>
@@ -4851,7 +4662,7 @@
                 </a:solidFill>
                 <a:latin typeface="Nunito Sans"/>
               </a:rPr>
-              <a:t>El sesgo es tratar peor una prueba solo porque me quita la razón. Aquí la prueba es mala.</a:t>
+              <a:t>Un sesgo no es cualquier atajo: es un atajo que falla, y siempre hacia el mismo lado.</a:t>
             </a:r>
           </a:p>
           <a:p>
@@ -4876,7 +4687,7 @@
                 </a:solidFill>
                 <a:latin typeface="Nunito Sans"/>
               </a:rPr>
-              <a:t>Conclusión: no cambiar de opinión por una mala razón no es un sesgo. Sí lo sería ignorar una buena prueba.</a:t>
+              <a:t>Conclusión: decidir rápido no es un error. Los atajos son útiles; el problema es cuando fallan de forma predecible.</a:t>
             </a:r>
           </a:p>
         </p:txBody>
@@ -4895,7 +4706,7 @@
     <p:bg>
       <p:bgPr>
         <a:solidFill>
-          <a:srgbClr val="1F2A44"/>
+          <a:srgbClr val="FBF7EF"/>
         </a:solidFill>
         <a:effectLst/>
       </p:bgPr>
@@ -4915,8 +4726,8 @@
         </p:nvSpPr>
         <p:spPr>
           <a:xfrm>
-            <a:off x="640000" y="2300000"/>
-            <a:ext cx="10912000" cy="500000"/>
+            <a:off x="640000" y="380000"/>
+            <a:ext cx="10912000" cy="420000"/>
           </a:xfrm>
           <a:prstGeom prst="rect">
             <a:avLst/>
@@ -4931,17 +4742,17 @@
           <a:p>
             <a:pPr>
               <a:spcAft>
-                <a:spcPts val="810"/>
-              </a:spcAft>
-            </a:pPr>
-            <a:r>
-              <a:rPr sz="1800" b="1">
-                <a:solidFill>
-                  <a:srgbClr val="F4B183"/>
-                </a:solidFill>
-                <a:latin typeface="Nunito Sans"/>
-              </a:rPr>
-              <a:t>BLOQUE 3</a:t>
+                <a:spcPts val="630"/>
+              </a:spcAft>
+            </a:pPr>
+            <a:r>
+              <a:rPr sz="1400" b="1">
+                <a:solidFill>
+                  <a:srgbClr val="E8793A"/>
+                </a:solidFill>
+                <a:latin typeface="Nunito Sans"/>
+              </a:rPr>
+              <a:t>LO DE HOY EN TRES LÍNEAS</a:t>
             </a:r>
           </a:p>
         </p:txBody>
@@ -4954,7 +4765,7 @@
         </p:nvSpPr>
         <p:spPr>
           <a:xfrm>
-            <a:off x="640000" y="2800000"/>
+            <a:off x="640000" y="760000"/>
             <a:ext cx="10912000" cy="800000"/>
           </a:xfrm>
           <a:prstGeom prst="rect">
@@ -4970,17 +4781,56 @@
           <a:p>
             <a:pPr>
               <a:spcAft>
-                <a:spcPts val="2160"/>
-              </a:spcAft>
-            </a:pPr>
-            <a:r>
-              <a:rPr sz="4800" b="1">
-                <a:solidFill>
-                  <a:srgbClr val="FBF7EF"/>
+                <a:spcPts val="1710"/>
+              </a:spcAft>
+            </a:pPr>
+            <a:r>
+              <a:rPr sz="3800" b="1">
+                <a:solidFill>
+                  <a:srgbClr val="1F2A44"/>
                 </a:solidFill>
                 <a:latin typeface="Fredoka"/>
               </a:rPr>
-              <a:t>Cómo frenarlo</a:t>
+              <a:t>Escríbelo tú primero, sin mirar</a:t>
+            </a:r>
+          </a:p>
+        </p:txBody>
+      </p:sp>
+      <p:sp>
+        <p:nvSpPr>
+          <p:cNvPr id="4" name="TextBox 3"/>
+          <p:cNvSpPr txBox="1"/>
+          <p:nvPr/>
+        </p:nvSpPr>
+        <p:spPr>
+          <a:xfrm>
+            <a:off x="640000" y="1800000"/>
+            <a:ext cx="10912000" cy="1500000"/>
+          </a:xfrm>
+          <a:prstGeom prst="rect">
+            <a:avLst/>
+          </a:prstGeom>
+          <a:noFill/>
+        </p:spPr>
+        <p:txBody>
+          <a:bodyPr wrap="square">
+            <a:spAutoFit/>
+          </a:bodyPr>
+          <a:lstStyle/>
+          <a:p>
+            <a:pPr>
+              <a:spcAft>
+                <a:spcPts val="1170"/>
+              </a:spcAft>
+            </a:pPr>
+            <a:r>
+              <a:rPr sz="2600" b="0">
+                <a:solidFill>
+                  <a:srgbClr val="4A5568"/>
+                </a:solidFill>
+                <a:latin typeface="Nunito Sans"/>
+              </a:rPr>
+              <a:t>Dos minutos. Después lo comparamos.</a:t>
             </a:r>
           </a:p>
         </p:txBody>
@@ -5045,7 +4895,7 @@
                 </a:solidFill>
                 <a:latin typeface="Nunito Sans"/>
               </a:rPr>
-              <a:t>BLOQUE 3 · CÓMO FRENARLO</a:t>
+              <a:t>LO DE HOY EN TRES LÍNEAS</a:t>
             </a:r>
           </a:p>
         </p:txBody>
@@ -5058,8 +4908,8 @@
         </p:nvSpPr>
         <p:spPr>
           <a:xfrm>
-            <a:off x="640000" y="760000"/>
-            <a:ext cx="10912000" cy="800000"/>
+            <a:off x="640000" y="1300000"/>
+            <a:ext cx="10912000" cy="4800000"/>
           </a:xfrm>
           <a:prstGeom prst="rect">
             <a:avLst/>
@@ -5074,158 +4924,76 @@
           <a:p>
             <a:pPr>
               <a:spcAft>
-                <a:spcPts val="1710"/>
-              </a:spcAft>
-            </a:pPr>
-            <a:r>
-              <a:rPr sz="3800" b="1">
+                <a:spcPts val="1350"/>
+              </a:spcAft>
+            </a:pPr>
+            <a:r>
+              <a:rPr sz="3000" b="1">
+                <a:solidFill>
+                  <a:srgbClr val="E8793A"/>
+                </a:solidFill>
+                <a:latin typeface="Nunito Sans"/>
+              </a:rPr>
+              <a:t>1. </a:t>
+            </a:r>
+            <a:r>
+              <a:rPr sz="3000" b="0">
                 <a:solidFill>
                   <a:srgbClr val="1F2A44"/>
                 </a:solidFill>
-                <a:latin typeface="Fredoka"/>
-              </a:rPr>
-              <a:t>Cuatro frenos al sesgo de confirmación</a:t>
-            </a:r>
-          </a:p>
-        </p:txBody>
-      </p:sp>
-      <p:sp>
-        <p:nvSpPr>
-          <p:cNvPr id="4" name="TextBox 3"/>
-          <p:cNvSpPr txBox="1"/>
-          <p:nvPr/>
-        </p:nvSpPr>
-        <p:spPr>
-          <a:xfrm>
-            <a:off x="640000" y="1650000"/>
-            <a:ext cx="10912000" cy="4808000"/>
-          </a:xfrm>
-          <a:prstGeom prst="rect">
-            <a:avLst/>
-          </a:prstGeom>
-          <a:noFill/>
-        </p:spPr>
-        <p:txBody>
-          <a:bodyPr wrap="square">
-            <a:spAutoFit/>
-          </a:bodyPr>
-          <a:lstStyle/>
-          <a:p>
-            <a:pPr>
-              <a:spcAft>
-                <a:spcPts val="1260"/>
-              </a:spcAft>
-            </a:pPr>
-            <a:r>
-              <a:rPr sz="2800" b="1">
+                <a:latin typeface="Nunito Sans"/>
+              </a:rPr>
+              <a:t>Un sesgo cognitivo es un error del pensamiento que se repite de forma predecible.</a:t>
+            </a:r>
+          </a:p>
+          <a:p>
+            <a:pPr>
+              <a:spcAft>
+                <a:spcPts val="1350"/>
+              </a:spcAft>
+            </a:pPr>
+            <a:r>
+              <a:rPr sz="3000" b="1">
                 <a:solidFill>
                   <a:srgbClr val="E8793A"/>
                 </a:solidFill>
                 <a:latin typeface="Nunito Sans"/>
               </a:rPr>
-              <a:t>• </a:t>
-            </a:r>
-            <a:r>
-              <a:rPr sz="2800" b="0">
+              <a:t>2. </a:t>
+            </a:r>
+            <a:r>
+              <a:rPr sz="3000" b="0">
                 <a:solidFill>
                   <a:srgbClr val="1F2A44"/>
                 </a:solidFill>
                 <a:latin typeface="Nunito Sans"/>
               </a:rPr>
-              <a:t>Preguntarme: «¿qué me haría cambiar de opinión?»</a:t>
-            </a:r>
-          </a:p>
-          <a:p>
-            <a:pPr>
-              <a:spcAft>
-                <a:spcPts val="1260"/>
-              </a:spcAft>
-            </a:pPr>
-            <a:r>
-              <a:rPr sz="2800" b="1">
+              <a:t>Viene de atajos mentales que casi siempre nos ayudan: decidir rápido no es un error.</a:t>
+            </a:r>
+          </a:p>
+          <a:p>
+            <a:pPr>
+              <a:spcAft>
+                <a:spcPts val="1350"/>
+              </a:spcAft>
+            </a:pPr>
+            <a:r>
+              <a:rPr sz="3000" b="1">
                 <a:solidFill>
                   <a:srgbClr val="E8793A"/>
                 </a:solidFill>
                 <a:latin typeface="Nunito Sans"/>
               </a:rPr>
-              <a:t>• </a:t>
-            </a:r>
-            <a:r>
-              <a:rPr sz="2800" b="0">
+              <a:t>3. </a:t>
+            </a:r>
+            <a:r>
+              <a:rPr sz="3000" b="0">
                 <a:solidFill>
                   <a:srgbClr val="1F2A44"/>
                 </a:solidFill>
                 <a:latin typeface="Nunito Sans"/>
               </a:rPr>
-              <a:t>Buscar a propósito lo que dice lo contrario</a:t>
-            </a:r>
-          </a:p>
-          <a:p>
-            <a:pPr>
-              <a:spcAft>
-                <a:spcPts val="1260"/>
-              </a:spcAft>
-            </a:pPr>
-            <a:r>
-              <a:rPr sz="2800" b="1">
-                <a:solidFill>
-                  <a:srgbClr val="E8793A"/>
-                </a:solidFill>
-                <a:latin typeface="Nunito Sans"/>
-              </a:rPr>
-              <a:t>• </a:t>
-            </a:r>
-            <a:r>
-              <a:rPr sz="2800" b="0">
-                <a:solidFill>
-                  <a:srgbClr val="1F2A44"/>
-                </a:solidFill>
-                <a:latin typeface="Nunito Sans"/>
-              </a:rPr>
-              <a:t>Apuntar los aciertos </a:t>
-            </a:r>
-            <a:r>
-              <a:rPr sz="2800" b="1">
-                <a:solidFill>
-                  <a:srgbClr val="1F2A44"/>
-                </a:solidFill>
-                <a:latin typeface="Nunito Sans"/>
-              </a:rPr>
-              <a:t>y</a:t>
-            </a:r>
-            <a:r>
-              <a:rPr sz="2800" b="0">
-                <a:solidFill>
-                  <a:srgbClr val="1F2A44"/>
-                </a:solidFill>
-                <a:latin typeface="Nunito Sans"/>
-              </a:rPr>
-              <a:t> los fallos</a:t>
-            </a:r>
-          </a:p>
-          <a:p>
-            <a:pPr>
-              <a:spcAft>
-                <a:spcPts val="1260"/>
-              </a:spcAft>
-            </a:pPr>
-            <a:r>
-              <a:rPr sz="2800" b="1">
-                <a:solidFill>
-                  <a:srgbClr val="E8793A"/>
-                </a:solidFill>
-                <a:latin typeface="Nunito Sans"/>
-              </a:rPr>
-              <a:t>• </a:t>
-            </a:r>
-            <a:r>
-              <a:rPr sz="2800" b="0">
-                <a:solidFill>
-                  <a:srgbClr val="1F2A44"/>
-                </a:solidFill>
-                <a:latin typeface="Nunito Sans"/>
-              </a:rPr>
-              <a:t>Escuchar a quien piensa distinto sin preparar la respuesta</a:t>
+              <a:t>Pensar despacio y comprobar ayuda a corregir los sesgos.</a:t>
             </a:r>
           </a:p>
         </p:txBody>
@@ -5239,312 +5007,6 @@
 </file>
 
 <file path=ppt/slides/slide16.xml><?xml version="1.0" encoding="utf-8"?>
-<p:sld xmlns:a="http://schemas.openxmlformats.org/drawingml/2006/main" xmlns:p="http://schemas.openxmlformats.org/presentationml/2006/main" xmlns:r="http://schemas.openxmlformats.org/officeDocument/2006/relationships">
-  <p:cSld>
-    <p:bg>
-      <p:bgPr>
-        <a:solidFill>
-          <a:srgbClr val="FBF7EF"/>
-        </a:solidFill>
-        <a:effectLst/>
-      </p:bgPr>
-    </p:bg>
-    <p:spTree>
-      <p:nvGrpSpPr>
-        <p:cNvPr id="1" name=""/>
-        <p:cNvGrpSpPr/>
-        <p:nvPr/>
-      </p:nvGrpSpPr>
-      <p:grpSpPr/>
-      <p:sp>
-        <p:nvSpPr>
-          <p:cNvPr id="2" name="TextBox 1"/>
-          <p:cNvSpPr txBox="1"/>
-          <p:nvPr/>
-        </p:nvSpPr>
-        <p:spPr>
-          <a:xfrm>
-            <a:off x="640000" y="380000"/>
-            <a:ext cx="10912000" cy="420000"/>
-          </a:xfrm>
-          <a:prstGeom prst="rect">
-            <a:avLst/>
-          </a:prstGeom>
-          <a:noFill/>
-        </p:spPr>
-        <p:txBody>
-          <a:bodyPr wrap="square">
-            <a:spAutoFit/>
-          </a:bodyPr>
-          <a:lstStyle/>
-          <a:p>
-            <a:pPr>
-              <a:spcAft>
-                <a:spcPts val="630"/>
-              </a:spcAft>
-            </a:pPr>
-            <a:r>
-              <a:rPr sz="1400" b="1">
-                <a:solidFill>
-                  <a:srgbClr val="E8793A"/>
-                </a:solidFill>
-                <a:latin typeface="Nunito Sans"/>
-              </a:rPr>
-              <a:t>LO DE HOY EN TRES LÍNEAS</a:t>
-            </a:r>
-          </a:p>
-        </p:txBody>
-      </p:sp>
-      <p:sp>
-        <p:nvSpPr>
-          <p:cNvPr id="3" name="TextBox 2"/>
-          <p:cNvSpPr txBox="1"/>
-          <p:nvPr/>
-        </p:nvSpPr>
-        <p:spPr>
-          <a:xfrm>
-            <a:off x="640000" y="760000"/>
-            <a:ext cx="10912000" cy="800000"/>
-          </a:xfrm>
-          <a:prstGeom prst="rect">
-            <a:avLst/>
-          </a:prstGeom>
-          <a:noFill/>
-        </p:spPr>
-        <p:txBody>
-          <a:bodyPr wrap="square">
-            <a:spAutoFit/>
-          </a:bodyPr>
-          <a:lstStyle/>
-          <a:p>
-            <a:pPr>
-              <a:spcAft>
-                <a:spcPts val="1710"/>
-              </a:spcAft>
-            </a:pPr>
-            <a:r>
-              <a:rPr sz="3800" b="1">
-                <a:solidFill>
-                  <a:srgbClr val="1F2A44"/>
-                </a:solidFill>
-                <a:latin typeface="Fredoka"/>
-              </a:rPr>
-              <a:t>Escríbelo tú primero, sin mirar</a:t>
-            </a:r>
-          </a:p>
-        </p:txBody>
-      </p:sp>
-      <p:sp>
-        <p:nvSpPr>
-          <p:cNvPr id="4" name="TextBox 3"/>
-          <p:cNvSpPr txBox="1"/>
-          <p:nvPr/>
-        </p:nvSpPr>
-        <p:spPr>
-          <a:xfrm>
-            <a:off x="640000" y="1800000"/>
-            <a:ext cx="10912000" cy="1500000"/>
-          </a:xfrm>
-          <a:prstGeom prst="rect">
-            <a:avLst/>
-          </a:prstGeom>
-          <a:noFill/>
-        </p:spPr>
-        <p:txBody>
-          <a:bodyPr wrap="square">
-            <a:spAutoFit/>
-          </a:bodyPr>
-          <a:lstStyle/>
-          <a:p>
-            <a:pPr>
-              <a:spcAft>
-                <a:spcPts val="1170"/>
-              </a:spcAft>
-            </a:pPr>
-            <a:r>
-              <a:rPr sz="2600" b="0">
-                <a:solidFill>
-                  <a:srgbClr val="4A5568"/>
-                </a:solidFill>
-                <a:latin typeface="Nunito Sans"/>
-              </a:rPr>
-              <a:t>Dos minutos. Después lo comparamos.</a:t>
-            </a:r>
-          </a:p>
-        </p:txBody>
-      </p:sp>
-    </p:spTree>
-  </p:cSld>
-  <p:clrMapOvr>
-    <a:masterClrMapping/>
-  </p:clrMapOvr>
-</p:sld>
-</file>
-
-<file path=ppt/slides/slide17.xml><?xml version="1.0" encoding="utf-8"?>
-<p:sld xmlns:a="http://schemas.openxmlformats.org/drawingml/2006/main" xmlns:p="http://schemas.openxmlformats.org/presentationml/2006/main" xmlns:r="http://schemas.openxmlformats.org/officeDocument/2006/relationships">
-  <p:cSld>
-    <p:bg>
-      <p:bgPr>
-        <a:solidFill>
-          <a:srgbClr val="FBF7EF"/>
-        </a:solidFill>
-        <a:effectLst/>
-      </p:bgPr>
-    </p:bg>
-    <p:spTree>
-      <p:nvGrpSpPr>
-        <p:cNvPr id="1" name=""/>
-        <p:cNvGrpSpPr/>
-        <p:nvPr/>
-      </p:nvGrpSpPr>
-      <p:grpSpPr/>
-      <p:sp>
-        <p:nvSpPr>
-          <p:cNvPr id="2" name="TextBox 1"/>
-          <p:cNvSpPr txBox="1"/>
-          <p:nvPr/>
-        </p:nvSpPr>
-        <p:spPr>
-          <a:xfrm>
-            <a:off x="640000" y="380000"/>
-            <a:ext cx="10912000" cy="420000"/>
-          </a:xfrm>
-          <a:prstGeom prst="rect">
-            <a:avLst/>
-          </a:prstGeom>
-          <a:noFill/>
-        </p:spPr>
-        <p:txBody>
-          <a:bodyPr wrap="square">
-            <a:spAutoFit/>
-          </a:bodyPr>
-          <a:lstStyle/>
-          <a:p>
-            <a:pPr>
-              <a:spcAft>
-                <a:spcPts val="630"/>
-              </a:spcAft>
-            </a:pPr>
-            <a:r>
-              <a:rPr sz="1400" b="1">
-                <a:solidFill>
-                  <a:srgbClr val="E8793A"/>
-                </a:solidFill>
-                <a:latin typeface="Nunito Sans"/>
-              </a:rPr>
-              <a:t>LO DE HOY EN TRES LÍNEAS</a:t>
-            </a:r>
-          </a:p>
-        </p:txBody>
-      </p:sp>
-      <p:sp>
-        <p:nvSpPr>
-          <p:cNvPr id="3" name="TextBox 2"/>
-          <p:cNvSpPr txBox="1"/>
-          <p:nvPr/>
-        </p:nvSpPr>
-        <p:spPr>
-          <a:xfrm>
-            <a:off x="640000" y="1300000"/>
-            <a:ext cx="10912000" cy="4800000"/>
-          </a:xfrm>
-          <a:prstGeom prst="rect">
-            <a:avLst/>
-          </a:prstGeom>
-          <a:noFill/>
-        </p:spPr>
-        <p:txBody>
-          <a:bodyPr wrap="square">
-            <a:spAutoFit/>
-          </a:bodyPr>
-          <a:lstStyle/>
-          <a:p>
-            <a:pPr>
-              <a:spcAft>
-                <a:spcPts val="1350"/>
-              </a:spcAft>
-            </a:pPr>
-            <a:r>
-              <a:rPr sz="3000" b="1">
-                <a:solidFill>
-                  <a:srgbClr val="E8793A"/>
-                </a:solidFill>
-                <a:latin typeface="Nunito Sans"/>
-              </a:rPr>
-              <a:t>1. </a:t>
-            </a:r>
-            <a:r>
-              <a:rPr sz="3000" b="0">
-                <a:solidFill>
-                  <a:srgbClr val="1F2A44"/>
-                </a:solidFill>
-                <a:latin typeface="Nunito Sans"/>
-              </a:rPr>
-              <a:t>El sesgo de confirmación es fijarnos solo en lo que nos da la razón.</a:t>
-            </a:r>
-          </a:p>
-          <a:p>
-            <a:pPr>
-              <a:spcAft>
-                <a:spcPts val="1350"/>
-              </a:spcAft>
-            </a:pPr>
-            <a:r>
-              <a:rPr sz="3000" b="1">
-                <a:solidFill>
-                  <a:srgbClr val="E8793A"/>
-                </a:solidFill>
-                <a:latin typeface="Nunito Sans"/>
-              </a:rPr>
-              <a:t>2. </a:t>
-            </a:r>
-            <a:r>
-              <a:rPr sz="3000" b="0">
-                <a:solidFill>
-                  <a:srgbClr val="1F2A44"/>
-                </a:solidFill>
-                <a:latin typeface="Nunito Sans"/>
-              </a:rPr>
-              <a:t>Buscamos, recordamos e interpretamos a favor de lo que ya creemos.</a:t>
-            </a:r>
-          </a:p>
-          <a:p>
-            <a:pPr>
-              <a:spcAft>
-                <a:spcPts val="1350"/>
-              </a:spcAft>
-            </a:pPr>
-            <a:r>
-              <a:rPr sz="3000" b="1">
-                <a:solidFill>
-                  <a:srgbClr val="E8793A"/>
-                </a:solidFill>
-                <a:latin typeface="Nunito Sans"/>
-              </a:rPr>
-              <a:t>3. </a:t>
-            </a:r>
-            <a:r>
-              <a:rPr sz="3000" b="0">
-                <a:solidFill>
-                  <a:srgbClr val="1F2A44"/>
-                </a:solidFill>
-                <a:latin typeface="Nunito Sans"/>
-              </a:rPr>
-              <a:t>Para frenarlo, busca a propósito lo que podría quitarte la razón.</a:t>
-            </a:r>
-          </a:p>
-        </p:txBody>
-      </p:sp>
-    </p:spTree>
-  </p:cSld>
-  <p:clrMapOvr>
-    <a:masterClrMapping/>
-  </p:clrMapOvr>
-</p:sld>
-</file>
-
-<file path=ppt/slides/slide18.xml><?xml version="1.0" encoding="utf-8"?>
 <p:sld xmlns:a="http://schemas.openxmlformats.org/drawingml/2006/main" xmlns:p="http://schemas.openxmlformats.org/presentationml/2006/main" xmlns:r="http://schemas.openxmlformats.org/officeDocument/2006/relationships">
   <p:cSld>
     <p:bg>
@@ -5635,7 +5097,7 @@
                 </a:solidFill>
                 <a:latin typeface="Fredoka"/>
               </a:rPr>
-              <a:t>El sesgo de confirmación y la tarea 2-4-6</a:t>
+              <a:t>Qué son los sesgos cognitivos</a:t>
             </a:r>
           </a:p>
         </p:txBody>
@@ -5674,7 +5136,7 @@
                 </a:solidFill>
                 <a:latin typeface="Nunito Sans"/>
               </a:rPr>
-              <a:t>Ver a gente real intentando adivinar la regla del 2-4-6 y cayendo en el sesgo.</a:t>
+              <a:t>Ver otros ejemplos de atajos mentales que fallan.</a:t>
             </a:r>
           </a:p>
         </p:txBody>
@@ -5687,7 +5149,7 @@
 </p:sld>
 </file>
 
-<file path=ppt/slides/slide19.xml><?xml version="1.0" encoding="utf-8"?>
+<file path=ppt/slides/slide17.xml><?xml version="1.0" encoding="utf-8"?>
 <p:sld xmlns:a="http://schemas.openxmlformats.org/drawingml/2006/main" xmlns:p="http://schemas.openxmlformats.org/presentationml/2006/main" xmlns:r="http://schemas.openxmlformats.org/officeDocument/2006/relationships">
   <p:cSld>
     <p:bg>
@@ -6332,7 +5794,7 @@
                 </a:solidFill>
                 <a:latin typeface="Nunito Sans"/>
               </a:rPr>
-              <a:t>Un ______ mental es una forma rápida de decidir sin pensar mucho.  (sesión 43)</a:t>
+              <a:t>La ______ es lo que pido; el interés, lo que necesito.  (sesión 43)</a:t>
             </a:r>
           </a:p>
           <a:p>
@@ -6357,7 +5819,7 @@
                 </a:solidFill>
                 <a:latin typeface="Nunito Sans"/>
               </a:rPr>
-              <a:t>Los sesgos nos pasan a ______, también a los expertos.  (sesión 43)</a:t>
+              <a:t>Ante un conflicto, ninguna actitud vale ______.  (sesión 43)</a:t>
             </a:r>
           </a:p>
           <a:p>
@@ -6382,7 +5844,7 @@
                 </a:solidFill>
                 <a:latin typeface="Nunito Sans"/>
               </a:rPr>
-              <a:t>Una muestra que no se parece a la población está ______.  (sesión 39)</a:t>
+              <a:t>Las cinco actitudes ante un conflicto son: evitar, ______, competir, pactar y colaborar.  (sesión 39)</a:t>
             </a:r>
           </a:p>
         </p:txBody>
@@ -6534,7 +5996,7 @@
                 </a:solidFill>
                 <a:latin typeface="Nunito Sans"/>
               </a:rPr>
-              <a:t>Un </a:t>
+              <a:t>La </a:t>
             </a:r>
             <a:r>
               <a:rPr sz="2600" b="1">
@@ -6543,7 +6005,7 @@
                 </a:solidFill>
                 <a:latin typeface="Nunito Sans"/>
               </a:rPr>
-              <a:t>atajo</a:t>
+              <a:t>postura</a:t>
             </a:r>
             <a:r>
               <a:rPr sz="2600" b="0">
@@ -6552,7 +6014,7 @@
                 </a:solidFill>
                 <a:latin typeface="Nunito Sans"/>
               </a:rPr>
-              <a:t> mental es una forma rápida de decidir sin pensar mucho.  (sesión 43)</a:t>
+              <a:t> es lo que pido; el interés, lo que necesito.  (sesión 43)</a:t>
             </a:r>
           </a:p>
           <a:p>
@@ -6577,7 +6039,7 @@
                 </a:solidFill>
                 <a:latin typeface="Nunito Sans"/>
               </a:rPr>
-              <a:t>Los sesgos nos pasan a </a:t>
+              <a:t>Ante un conflicto, ninguna actitud vale </a:t>
             </a:r>
             <a:r>
               <a:rPr sz="2600" b="1">
@@ -6586,7 +6048,7 @@
                 </a:solidFill>
                 <a:latin typeface="Nunito Sans"/>
               </a:rPr>
-              <a:t>todos</a:t>
+              <a:t>siempre</a:t>
             </a:r>
             <a:r>
               <a:rPr sz="2600" b="0">
@@ -6595,7 +6057,7 @@
                 </a:solidFill>
                 <a:latin typeface="Nunito Sans"/>
               </a:rPr>
-              <a:t>, también a los expertos.  (sesión 43)</a:t>
+              <a:t>.  (sesión 43)</a:t>
             </a:r>
           </a:p>
           <a:p>
@@ -6620,7 +6082,7 @@
                 </a:solidFill>
                 <a:latin typeface="Nunito Sans"/>
               </a:rPr>
-              <a:t>Una muestra que no se parece a la población está </a:t>
+              <a:t>Las cinco actitudes ante un conflicto son: evitar, </a:t>
             </a:r>
             <a:r>
               <a:rPr sz="2600" b="1">
@@ -6629,7 +6091,7 @@
                 </a:solidFill>
                 <a:latin typeface="Nunito Sans"/>
               </a:rPr>
-              <a:t>sesgada</a:t>
+              <a:t>ceder</a:t>
             </a:r>
             <a:r>
               <a:rPr sz="2600" b="0">
@@ -6638,7 +6100,7 @@
                 </a:solidFill>
                 <a:latin typeface="Nunito Sans"/>
               </a:rPr>
-              <a:t>.  (sesión 39)</a:t>
+              <a:t>, competir, pactar y colaborar.  (sesión 39)</a:t>
             </a:r>
           </a:p>
         </p:txBody>
@@ -6785,7 +6247,7 @@
                 </a:solidFill>
                 <a:latin typeface="Nunito Sans"/>
               </a:rPr>
-              <a:t>Un campesino pierde su hacha y sospecha del hijo del vecino. Desde entonces, el chico camina, habla y sonríe «como un ladrón».</a:t>
+              <a:t>Un bate y una pelota cuestan 1,10 € en total. El bate cuesta 1 € más que la pelota.</a:t>
             </a:r>
           </a:p>
         </p:txBody>
@@ -6824,7 +6286,7 @@
                 </a:solidFill>
                 <a:latin typeface="Nunito Sans"/>
               </a:rPr>
-              <a:t>¿Ha cambiado el chico? ¿O ha cambiado otra cosa?</a:t>
+              <a:t>¿Cuánto cuesta la pelota? Contesta rápido, en tu cabeza.</a:t>
             </a:r>
           </a:p>
         </p:txBody>
@@ -6928,7 +6390,7 @@
                 </a:solidFill>
                 <a:latin typeface="Fredoka"/>
               </a:rPr>
-              <a:t>Ver solo lo que nos da la razón</a:t>
+              <a:t>Atajos que fallan</a:t>
             </a:r>
           </a:p>
         </p:txBody>
@@ -6993,7 +6455,7 @@
                 </a:solidFill>
                 <a:latin typeface="Nunito Sans"/>
               </a:rPr>
-              <a:t>BLOQUE 1 · VER SOLO LO QUE NOS DA LA RAZÓN</a:t>
+              <a:t>BLOQUE 1 · ATAJOS QUE FALLAN</a:t>
             </a:r>
           </a:p>
         </p:txBody>
@@ -7032,7 +6494,7 @@
                 </a:solidFill>
                 <a:latin typeface="Fredoka"/>
               </a:rPr>
-              <a:t>Sesgo de confirmación</a:t>
+              <a:t>Sesgo cognitivo</a:t>
             </a:r>
           </a:p>
         </p:txBody>
@@ -7114,7 +6576,25 @@
                 </a:solidFill>
                 <a:latin typeface="Nunito Sans"/>
               </a:rPr>
-              <a:t>Es la tendencia a fijarnos solo en lo que confirma lo que ya creemos.</a:t>
+              <a:t>Un sesgo cognitivo es un error del pensamiento que se </a:t>
+            </a:r>
+            <a:r>
+              <a:rPr sz="2800" b="1">
+                <a:solidFill>
+                  <a:srgbClr val="1F2A44"/>
+                </a:solidFill>
+                <a:latin typeface="Nunito Sans"/>
+              </a:rPr>
+              <a:t>repite</a:t>
+            </a:r>
+            <a:r>
+              <a:rPr sz="2800" b="1">
+                <a:solidFill>
+                  <a:srgbClr val="1F2A44"/>
+                </a:solidFill>
+                <a:latin typeface="Nunito Sans"/>
+              </a:rPr>
+              <a:t> de forma predecible: siempre hacia el mismo lado.</a:t>
             </a:r>
           </a:p>
         </p:txBody>
@@ -7162,7 +6642,7 @@
                 </a:solidFill>
                 <a:latin typeface="Nunito Sans"/>
               </a:rPr>
-              <a:t>Confirmar:</a:t>
+              <a:t>Cognitivo:</a:t>
             </a:r>
             <a:r>
               <a:rPr sz="2800" b="0">
@@ -7171,7 +6651,7 @@
                 </a:solidFill>
                 <a:latin typeface="Nunito Sans"/>
               </a:rPr>
-              <a:t> dar por bueno, apoyar</a:t>
+              <a:t> que tiene que ver con pensar y conocer</a:t>
             </a:r>
           </a:p>
           <a:p>
@@ -7196,7 +6676,7 @@
                 </a:solidFill>
                 <a:latin typeface="Nunito Sans"/>
               </a:rPr>
-              <a:t>Buscamos</a:t>
+              <a:t>Sesgo:</a:t>
             </a:r>
             <a:r>
               <a:rPr sz="2800" b="0">
@@ -7205,7 +6685,7 @@
                 </a:solidFill>
                 <a:latin typeface="Nunito Sans"/>
               </a:rPr>
-              <a:t> lo que nos da la razón</a:t>
+              <a:t> inclinación hacia un lado (como la muestra sesgada)</a:t>
             </a:r>
           </a:p>
           <a:p>
@@ -7230,7 +6710,7 @@
                 </a:solidFill>
                 <a:latin typeface="Nunito Sans"/>
               </a:rPr>
-              <a:t>Recordamos</a:t>
+              <a:t>Atajo mental:</a:t>
             </a:r>
             <a:r>
               <a:rPr sz="2800" b="0">
@@ -7239,7 +6719,7 @@
                 </a:solidFill>
                 <a:latin typeface="Nunito Sans"/>
               </a:rPr>
-              <a:t> mejor lo que nos da la razón</a:t>
+              <a:t> una forma rápida de decidir sin pensar mucho</a:t>
             </a:r>
           </a:p>
           <a:p>
@@ -7258,22 +6738,13 @@
               <a:t>• </a:t>
             </a:r>
             <a:r>
-              <a:rPr sz="2800" b="1">
+              <a:rPr sz="2800" b="0">
                 <a:solidFill>
                   <a:srgbClr val="1F2A44"/>
                 </a:solidFill>
                 <a:latin typeface="Nunito Sans"/>
               </a:rPr>
-              <a:t>Interpretamos</a:t>
-            </a:r>
-            <a:r>
-              <a:rPr sz="2800" b="0">
-                <a:solidFill>
-                  <a:srgbClr val="1F2A44"/>
-                </a:solidFill>
-                <a:latin typeface="Nunito Sans"/>
-              </a:rPr>
-              <a:t> los datos dudosos a nuestro favor</a:t>
+              <a:t>Nos pasa a todos, también a los expertos</a:t>
             </a:r>
           </a:p>
         </p:txBody>
@@ -7338,7 +6809,7 @@
                 </a:solidFill>
                 <a:latin typeface="Nunito Sans"/>
               </a:rPr>
-              <a:t>BLOQUE 1 · VER SOLO LO QUE NOS DA LA RAZÓN</a:t>
+              <a:t>BLOQUE 1 · ATAJOS QUE FALLAN</a:t>
             </a:r>
           </a:p>
         </p:txBody>
@@ -7377,221 +6848,389 @@
                 </a:solidFill>
                 <a:latin typeface="Fredoka"/>
               </a:rPr>
-              <a:t>Tres formas de confirmar</a:t>
-            </a:r>
-          </a:p>
-        </p:txBody>
-      </p:sp>
-      <p:graphicFrame>
-        <p:nvGraphicFramePr>
-          <p:cNvPr id="4" name="Table 3"/>
-          <p:cNvGraphicFramePr>
-            <a:graphicFrameLocks noGrp="1"/>
-          </p:cNvGraphicFramePr>
+              <a:t>Falacia o sesgo: ¿dónde está el fallo?</a:t>
+            </a:r>
+          </a:p>
+        </p:txBody>
+      </p:sp>
+      <p:sp>
+        <p:nvSpPr>
+          <p:cNvPr id="4" name="Rectangle 3"/>
+          <p:cNvSpPr/>
           <p:nvPr/>
-        </p:nvGraphicFramePr>
-        <p:xfrm>
-          <a:off x="640000" y="1700000"/>
-          <a:ext cx="10912000" cy="2400000"/>
-        </p:xfrm>
-        <a:graphic>
-          <a:graphicData uri="http://schemas.openxmlformats.org/drawingml/2006/table">
-            <a:tbl>
-              <a:tblPr firstRow="1" bandRow="1">
-                <a:tableStyleId>{5C22544A-7EE6-4342-B048-85BDC9FD1C3A}</a:tableStyleId>
-              </a:tblPr>
-              <a:tblGrid>
-                <a:gridCol w="5456000"/>
-                <a:gridCol w="5456000"/>
-              </a:tblGrid>
-              <a:tr h="600000">
-                <a:tc>
-                  <a:txBody>
-                    <a:bodyPr/>
-                    <a:lstStyle/>
-                    <a:p>
-                      <a:r>
-                        <a:rPr sz="2000" b="1">
-                          <a:solidFill>
-                            <a:srgbClr val="FBF7EF"/>
-                          </a:solidFill>
-                          <a:latin typeface="Fredoka"/>
-                        </a:rPr>
-                        <a:t>Forma</a:t>
-                      </a:r>
-                    </a:p>
-                  </a:txBody>
-                  <a:tcPr>
-                    <a:solidFill>
-                      <a:srgbClr val="1F2A44"/>
-                    </a:solidFill>
-                  </a:tcPr>
-                </a:tc>
-                <a:tc>
-                  <a:txBody>
-                    <a:bodyPr/>
-                    <a:lstStyle/>
-                    <a:p>
-                      <a:r>
-                        <a:rPr sz="2000" b="1">
-                          <a:solidFill>
-                            <a:srgbClr val="FBF7EF"/>
-                          </a:solidFill>
-                          <a:latin typeface="Fredoka"/>
-                        </a:rPr>
-                        <a:t>Ejemplo</a:t>
-                      </a:r>
-                    </a:p>
-                  </a:txBody>
-                  <a:tcPr>
-                    <a:solidFill>
-                      <a:srgbClr val="1F2A44"/>
-                    </a:solidFill>
-                  </a:tcPr>
-                </a:tc>
-              </a:tr>
-              <a:tr h="600000">
-                <a:tc>
-                  <a:txBody>
-                    <a:bodyPr/>
-                    <a:lstStyle/>
-                    <a:p>
-                      <a:r>
-                        <a:rPr sz="2000" b="0">
-                          <a:solidFill>
-                            <a:srgbClr val="1F2A44"/>
-                          </a:solidFill>
-                          <a:latin typeface="Nunito Sans"/>
-                        </a:rPr>
-                        <a:t>Buscar</a:t>
-                      </a:r>
-                    </a:p>
-                  </a:txBody>
-                  <a:tcPr>
-                    <a:solidFill>
-                      <a:srgbClr val="FFFFFF"/>
-                    </a:solidFill>
-                  </a:tcPr>
-                </a:tc>
-                <a:tc>
-                  <a:txBody>
-                    <a:bodyPr/>
-                    <a:lstStyle/>
-                    <a:p>
-                      <a:r>
-                        <a:rPr sz="2000" b="0">
-                          <a:solidFill>
-                            <a:srgbClr val="1F2A44"/>
-                          </a:solidFill>
-                          <a:latin typeface="Nunito Sans"/>
-                        </a:rPr>
-                        <a:t>Solo veo vídeos que dicen que mi equipo es el mejor</a:t>
-                      </a:r>
-                    </a:p>
-                  </a:txBody>
-                  <a:tcPr>
-                    <a:solidFill>
-                      <a:srgbClr val="FFFFFF"/>
-                    </a:solidFill>
-                  </a:tcPr>
-                </a:tc>
-              </a:tr>
-              <a:tr h="600000">
-                <a:tc>
-                  <a:txBody>
-                    <a:bodyPr/>
-                    <a:lstStyle/>
-                    <a:p>
-                      <a:r>
-                        <a:rPr sz="2000" b="0">
-                          <a:solidFill>
-                            <a:srgbClr val="1F2A44"/>
-                          </a:solidFill>
-                          <a:latin typeface="Nunito Sans"/>
-                        </a:rPr>
-                        <a:t>Recordar</a:t>
-                      </a:r>
-                    </a:p>
-                  </a:txBody>
-                  <a:tcPr>
-                    <a:solidFill>
-                      <a:srgbClr val="EAF0F7"/>
-                    </a:solidFill>
-                  </a:tcPr>
-                </a:tc>
-                <a:tc>
-                  <a:txBody>
-                    <a:bodyPr/>
-                    <a:lstStyle/>
-                    <a:p>
-                      <a:r>
-                        <a:rPr sz="2000" b="0">
-                          <a:solidFill>
-                            <a:srgbClr val="1F2A44"/>
-                          </a:solidFill>
-                          <a:latin typeface="Nunito Sans"/>
-                        </a:rPr>
-                        <a:t>Me acuerdo del día que el horóscopo acertó</a:t>
-                      </a:r>
-                    </a:p>
-                  </a:txBody>
-                  <a:tcPr>
-                    <a:solidFill>
-                      <a:srgbClr val="EAF0F7"/>
-                    </a:solidFill>
-                  </a:tcPr>
-                </a:tc>
-              </a:tr>
-              <a:tr h="600000">
-                <a:tc>
-                  <a:txBody>
-                    <a:bodyPr/>
-                    <a:lstStyle/>
-                    <a:p>
-                      <a:r>
-                        <a:rPr sz="2000" b="0">
-                          <a:solidFill>
-                            <a:srgbClr val="1F2A44"/>
-                          </a:solidFill>
-                          <a:latin typeface="Nunito Sans"/>
-                        </a:rPr>
-                        <a:t>Interpretar</a:t>
-                      </a:r>
-                    </a:p>
-                  </a:txBody>
-                  <a:tcPr>
-                    <a:solidFill>
-                      <a:srgbClr val="FFFFFF"/>
-                    </a:solidFill>
-                  </a:tcPr>
-                </a:tc>
-                <a:tc>
-                  <a:txBody>
-                    <a:bodyPr/>
-                    <a:lstStyle/>
-                    <a:p>
-                      <a:r>
-                        <a:rPr sz="2000" b="0">
-                          <a:solidFill>
-                            <a:srgbClr val="1F2A44"/>
-                          </a:solidFill>
-                          <a:latin typeface="Nunito Sans"/>
-                        </a:rPr>
-                        <a:t>Falta contra el Athletic: «¡robo!». A favor: «era clarísima»</a:t>
-                      </a:r>
-                    </a:p>
-                  </a:txBody>
-                  <a:tcPr>
-                    <a:solidFill>
-                      <a:srgbClr val="FFFFFF"/>
-                    </a:solidFill>
-                  </a:tcPr>
-                </a:tc>
-              </a:tr>
-            </a:tbl>
-          </a:graphicData>
-        </a:graphic>
-      </p:graphicFrame>
+        </p:nvSpPr>
+        <p:spPr>
+          <a:xfrm>
+            <a:off x="640000" y="1650000"/>
+            <a:ext cx="5306000" cy="4400000"/>
+          </a:xfrm>
+          <a:prstGeom prst="rect">
+            <a:avLst/>
+          </a:prstGeom>
+          <a:solidFill>
+            <a:srgbClr val="FBE3D2"/>
+          </a:solidFill>
+          <a:ln>
+            <a:noFill/>
+          </a:ln>
+        </p:spPr>
+        <p:style>
+          <a:lnRef idx="1">
+            <a:schemeClr val="accent1"/>
+          </a:lnRef>
+          <a:fillRef idx="3">
+            <a:schemeClr val="accent1"/>
+          </a:fillRef>
+          <a:effectRef idx="2">
+            <a:schemeClr val="accent1"/>
+          </a:effectRef>
+          <a:fontRef idx="minor">
+            <a:schemeClr val="lt1"/>
+          </a:fontRef>
+        </p:style>
+        <p:txBody>
+          <a:bodyPr rtlCol="0" anchor="ctr"/>
+          <a:lstStyle/>
+          <a:p>
+            <a:pPr algn="ctr"/>
+          </a:p>
+        </p:txBody>
+      </p:sp>
+      <p:sp>
+        <p:nvSpPr>
+          <p:cNvPr id="5" name="TextBox 4"/>
+          <p:cNvSpPr txBox="1"/>
+          <p:nvPr/>
+        </p:nvSpPr>
+        <p:spPr>
+          <a:xfrm>
+            <a:off x="840000" y="1750000"/>
+            <a:ext cx="4906000" cy="600000"/>
+          </a:xfrm>
+          <a:prstGeom prst="rect">
+            <a:avLst/>
+          </a:prstGeom>
+          <a:noFill/>
+        </p:spPr>
+        <p:txBody>
+          <a:bodyPr wrap="square">
+            <a:spAutoFit/>
+          </a:bodyPr>
+          <a:lstStyle/>
+          <a:p>
+            <a:pPr>
+              <a:spcAft>
+                <a:spcPts val="1260"/>
+              </a:spcAft>
+            </a:pPr>
+            <a:r>
+              <a:rPr sz="2800" b="1">
+                <a:solidFill>
+                  <a:srgbClr val="C2531C"/>
+                </a:solidFill>
+                <a:latin typeface="Nunito Sans"/>
+              </a:rPr>
+              <a:t>Falacia: fuera</a:t>
+            </a:r>
+          </a:p>
+        </p:txBody>
+      </p:sp>
+      <p:sp>
+        <p:nvSpPr>
+          <p:cNvPr id="6" name="TextBox 5"/>
+          <p:cNvSpPr txBox="1"/>
+          <p:nvPr/>
+        </p:nvSpPr>
+        <p:spPr>
+          <a:xfrm>
+            <a:off x="840000" y="2400000"/>
+            <a:ext cx="4906000" cy="3500000"/>
+          </a:xfrm>
+          <a:prstGeom prst="rect">
+            <a:avLst/>
+          </a:prstGeom>
+          <a:noFill/>
+        </p:spPr>
+        <p:txBody>
+          <a:bodyPr wrap="square">
+            <a:spAutoFit/>
+          </a:bodyPr>
+          <a:lstStyle/>
+          <a:p>
+            <a:pPr>
+              <a:spcAft>
+                <a:spcPts val="1170"/>
+              </a:spcAft>
+            </a:pPr>
+            <a:r>
+              <a:rPr sz="2600" b="1">
+                <a:solidFill>
+                  <a:srgbClr val="E8793A"/>
+                </a:solidFill>
+                <a:latin typeface="Nunito Sans"/>
+              </a:rPr>
+              <a:t>• </a:t>
+            </a:r>
+            <a:r>
+              <a:rPr sz="2600" b="0">
+                <a:solidFill>
+                  <a:srgbClr val="1F2A44"/>
+                </a:solidFill>
+                <a:latin typeface="Nunito Sans"/>
+              </a:rPr>
+              <a:t>El fallo está en el </a:t>
+            </a:r>
+            <a:r>
+              <a:rPr sz="2600" b="1">
+                <a:solidFill>
+                  <a:srgbClr val="1F2A44"/>
+                </a:solidFill>
+                <a:latin typeface="Nunito Sans"/>
+              </a:rPr>
+              <a:t>argumento</a:t>
+            </a:r>
+          </a:p>
+          <a:p>
+            <a:pPr>
+              <a:spcAft>
+                <a:spcPts val="1170"/>
+              </a:spcAft>
+            </a:pPr>
+            <a:r>
+              <a:rPr sz="2600" b="1">
+                <a:solidFill>
+                  <a:srgbClr val="E8793A"/>
+                </a:solidFill>
+                <a:latin typeface="Nunito Sans"/>
+              </a:rPr>
+              <a:t>• </a:t>
+            </a:r>
+            <a:r>
+              <a:rPr sz="2600" b="0">
+                <a:solidFill>
+                  <a:srgbClr val="1F2A44"/>
+                </a:solidFill>
+                <a:latin typeface="Nunito Sans"/>
+              </a:rPr>
+              <a:t>Se ve en lo que alguien dice o escribe</a:t>
+            </a:r>
+          </a:p>
+          <a:p>
+            <a:pPr>
+              <a:spcAft>
+                <a:spcPts val="1170"/>
+              </a:spcAft>
+            </a:pPr>
+            <a:r>
+              <a:rPr sz="2600" b="1">
+                <a:solidFill>
+                  <a:srgbClr val="E8793A"/>
+                </a:solidFill>
+                <a:latin typeface="Nunito Sans"/>
+              </a:rPr>
+              <a:t>• </a:t>
+            </a:r>
+            <a:r>
+              <a:rPr sz="2600" b="0">
+                <a:solidFill>
+                  <a:srgbClr val="1F2A44"/>
+                </a:solidFill>
+                <a:latin typeface="Nunito Sans"/>
+              </a:rPr>
+              <a:t>Ejemplo: atacar a la persona en vez de a su idea</a:t>
+            </a:r>
+          </a:p>
+        </p:txBody>
+      </p:sp>
+      <p:sp>
+        <p:nvSpPr>
+          <p:cNvPr id="7" name="Rectangle 6"/>
+          <p:cNvSpPr/>
+          <p:nvPr/>
+        </p:nvSpPr>
+        <p:spPr>
+          <a:xfrm>
+            <a:off x="6246000" y="1650000"/>
+            <a:ext cx="5306000" cy="4400000"/>
+          </a:xfrm>
+          <a:prstGeom prst="rect">
+            <a:avLst/>
+          </a:prstGeom>
+          <a:solidFill>
+            <a:srgbClr val="EAF0F7"/>
+          </a:solidFill>
+          <a:ln>
+            <a:noFill/>
+          </a:ln>
+        </p:spPr>
+        <p:style>
+          <a:lnRef idx="1">
+            <a:schemeClr val="accent1"/>
+          </a:lnRef>
+          <a:fillRef idx="3">
+            <a:schemeClr val="accent1"/>
+          </a:fillRef>
+          <a:effectRef idx="2">
+            <a:schemeClr val="accent1"/>
+          </a:effectRef>
+          <a:fontRef idx="minor">
+            <a:schemeClr val="lt1"/>
+          </a:fontRef>
+        </p:style>
+        <p:txBody>
+          <a:bodyPr rtlCol="0" anchor="ctr"/>
+          <a:lstStyle/>
+          <a:p>
+            <a:pPr algn="ctr"/>
+          </a:p>
+        </p:txBody>
+      </p:sp>
+      <p:sp>
+        <p:nvSpPr>
+          <p:cNvPr id="8" name="TextBox 7"/>
+          <p:cNvSpPr txBox="1"/>
+          <p:nvPr/>
+        </p:nvSpPr>
+        <p:spPr>
+          <a:xfrm>
+            <a:off x="6446000" y="1750000"/>
+            <a:ext cx="4906000" cy="600000"/>
+          </a:xfrm>
+          <a:prstGeom prst="rect">
+            <a:avLst/>
+          </a:prstGeom>
+          <a:noFill/>
+        </p:spPr>
+        <p:txBody>
+          <a:bodyPr wrap="square">
+            <a:spAutoFit/>
+          </a:bodyPr>
+          <a:lstStyle/>
+          <a:p>
+            <a:pPr>
+              <a:spcAft>
+                <a:spcPts val="1260"/>
+              </a:spcAft>
+            </a:pPr>
+            <a:r>
+              <a:rPr sz="2800" b="1">
+                <a:solidFill>
+                  <a:srgbClr val="2F6FB5"/>
+                </a:solidFill>
+                <a:latin typeface="Nunito Sans"/>
+              </a:rPr>
+              <a:t>Sesgo: dentro</a:t>
+            </a:r>
+          </a:p>
+        </p:txBody>
+      </p:sp>
+      <p:sp>
+        <p:nvSpPr>
+          <p:cNvPr id="9" name="TextBox 8"/>
+          <p:cNvSpPr txBox="1"/>
+          <p:nvPr/>
+        </p:nvSpPr>
+        <p:spPr>
+          <a:xfrm>
+            <a:off x="6446000" y="2400000"/>
+            <a:ext cx="4906000" cy="3500000"/>
+          </a:xfrm>
+          <a:prstGeom prst="rect">
+            <a:avLst/>
+          </a:prstGeom>
+          <a:noFill/>
+        </p:spPr>
+        <p:txBody>
+          <a:bodyPr wrap="square">
+            <a:spAutoFit/>
+          </a:bodyPr>
+          <a:lstStyle/>
+          <a:p>
+            <a:pPr>
+              <a:spcAft>
+                <a:spcPts val="1170"/>
+              </a:spcAft>
+            </a:pPr>
+            <a:r>
+              <a:rPr sz="2600" b="1">
+                <a:solidFill>
+                  <a:srgbClr val="E8793A"/>
+                </a:solidFill>
+                <a:latin typeface="Nunito Sans"/>
+              </a:rPr>
+              <a:t>• </a:t>
+            </a:r>
+            <a:r>
+              <a:rPr sz="2600" b="0">
+                <a:solidFill>
+                  <a:srgbClr val="1F2A44"/>
+                </a:solidFill>
+                <a:latin typeface="Nunito Sans"/>
+              </a:rPr>
+              <a:t>El atajo que falla está en mi </a:t>
+            </a:r>
+            <a:r>
+              <a:rPr sz="2600" b="1">
+                <a:solidFill>
+                  <a:srgbClr val="1F2A44"/>
+                </a:solidFill>
+                <a:latin typeface="Nunito Sans"/>
+              </a:rPr>
+              <a:t>cabeza</a:t>
+            </a:r>
+          </a:p>
+          <a:p>
+            <a:pPr>
+              <a:spcAft>
+                <a:spcPts val="1170"/>
+              </a:spcAft>
+            </a:pPr>
+            <a:r>
+              <a:rPr sz="2600" b="1">
+                <a:solidFill>
+                  <a:srgbClr val="E8793A"/>
+                </a:solidFill>
+                <a:latin typeface="Nunito Sans"/>
+              </a:rPr>
+              <a:t>• </a:t>
+            </a:r>
+            <a:r>
+              <a:rPr sz="2600" b="0">
+                <a:solidFill>
+                  <a:srgbClr val="1F2A44"/>
+                </a:solidFill>
+                <a:latin typeface="Nunito Sans"/>
+              </a:rPr>
+              <a:t>Me pasa aunque nadie me quiera engañar</a:t>
+            </a:r>
+          </a:p>
+          <a:p>
+            <a:pPr>
+              <a:spcAft>
+                <a:spcPts val="1170"/>
+              </a:spcAft>
+            </a:pPr>
+            <a:r>
+              <a:rPr sz="2600" b="1">
+                <a:solidFill>
+                  <a:srgbClr val="E8793A"/>
+                </a:solidFill>
+                <a:latin typeface="Nunito Sans"/>
+              </a:rPr>
+              <a:t>• </a:t>
+            </a:r>
+            <a:r>
+              <a:rPr sz="2600" b="0">
+                <a:solidFill>
+                  <a:srgbClr val="1F2A44"/>
+                </a:solidFill>
+                <a:latin typeface="Nunito Sans"/>
+              </a:rPr>
+              <a:t>Ejemplo: decir rápido que la pelota cuesta 10 céntimos</a:t>
+            </a:r>
+          </a:p>
+        </p:txBody>
+      </p:sp>
     </p:spTree>
   </p:cSld>
   <p:clrMapOvr>
@@ -7652,7 +7291,7 @@
                 </a:solidFill>
                 <a:latin typeface="Nunito Sans"/>
               </a:rPr>
-              <a:t>BLOQUE 1 · VER SOLO LO QUE NOS DA LA RAZÓN</a:t>
+              <a:t>BLOQUE 1 · ATAJOS QUE FALLAN</a:t>
             </a:r>
           </a:p>
         </p:txBody>
@@ -7665,8 +7304,8 @@
         </p:nvSpPr>
         <p:spPr>
           <a:xfrm>
-            <a:off x="640000" y="1500000"/>
-            <a:ext cx="10912000" cy="3000000"/>
+            <a:off x="640000" y="760000"/>
+            <a:ext cx="10912000" cy="800000"/>
           </a:xfrm>
           <a:prstGeom prst="rect">
             <a:avLst/>
@@ -7681,60 +7320,320 @@
           <a:p>
             <a:pPr>
               <a:spcAft>
-                <a:spcPts val="1530"/>
-              </a:spcAft>
-            </a:pPr>
-            <a:r>
-              <a:rPr sz="3400" b="1">
+                <a:spcPts val="1710"/>
+              </a:spcAft>
+            </a:pPr>
+            <a:r>
+              <a:rPr sz="3800" b="1">
                 <a:solidFill>
                   <a:srgbClr val="1F2A44"/>
                 </a:solidFill>
-                <a:latin typeface="Nunito Sans"/>
-              </a:rPr>
-              <a:t>El entendimiento humano, cuando ha adoptado una opinión, atrae todo lo demás para apoyarla y hacerla concordar con ella.</a:t>
-            </a:r>
-          </a:p>
-        </p:txBody>
-      </p:sp>
-      <p:sp>
-        <p:nvSpPr>
-          <p:cNvPr id="4" name="TextBox 3"/>
-          <p:cNvSpPr txBox="1"/>
+                <a:latin typeface="Fredoka"/>
+              </a:rPr>
+              <a:t>Dos formas de pensar, según Daniel Kahneman</a:t>
+            </a:r>
+          </a:p>
+        </p:txBody>
+      </p:sp>
+      <p:graphicFrame>
+        <p:nvGraphicFramePr>
+          <p:cNvPr id="4" name="Table 3"/>
+          <p:cNvGraphicFramePr>
+            <a:graphicFrameLocks noGrp="1"/>
+          </p:cNvGraphicFramePr>
           <p:nvPr/>
-        </p:nvSpPr>
-        <p:spPr>
-          <a:xfrm>
-            <a:off x="640000" y="4700000"/>
-            <a:ext cx="10912000" cy="600000"/>
-          </a:xfrm>
-          <a:prstGeom prst="rect">
-            <a:avLst/>
-          </a:prstGeom>
-          <a:noFill/>
-        </p:spPr>
-        <p:txBody>
-          <a:bodyPr wrap="square">
-            <a:spAutoFit/>
-          </a:bodyPr>
-          <a:lstStyle/>
-          <a:p>
-            <a:pPr>
-              <a:spcAft>
-                <a:spcPts val="990"/>
-              </a:spcAft>
-            </a:pPr>
-            <a:r>
-              <a:rPr sz="2200" b="0">
-                <a:solidFill>
-                  <a:srgbClr val="4A5568"/>
-                </a:solidFill>
-                <a:latin typeface="Nunito Sans"/>
-              </a:rPr>
-              <a:t>Francis Bacon, Novum Organum (1620)</a:t>
-            </a:r>
-          </a:p>
-        </p:txBody>
-      </p:sp>
+        </p:nvGraphicFramePr>
+        <p:xfrm>
+          <a:off x="640000" y="1700000"/>
+          <a:ext cx="10912000" cy="2400000"/>
+        </p:xfrm>
+        <a:graphic>
+          <a:graphicData uri="http://schemas.openxmlformats.org/drawingml/2006/table">
+            <a:tbl>
+              <a:tblPr firstRow="1" bandRow="1">
+                <a:tableStyleId>{5C22544A-7EE6-4342-B048-85BDC9FD1C3A}</a:tableStyleId>
+              </a:tblPr>
+              <a:tblGrid>
+                <a:gridCol w="3637333"/>
+                <a:gridCol w="3637333"/>
+                <a:gridCol w="3637334"/>
+              </a:tblGrid>
+              <a:tr h="600000">
+                <a:tc>
+                  <a:txBody>
+                    <a:bodyPr/>
+                    <a:lstStyle/>
+                    <a:p>
+                      <a:r>
+                        <a:rPr sz="2000" b="1">
+                          <a:solidFill>
+                            <a:srgbClr val="FBF7EF"/>
+                          </a:solidFill>
+                          <a:latin typeface="Fredoka"/>
+                        </a:rPr>
+                        <a:t>Aspecto</a:t>
+                      </a:r>
+                    </a:p>
+                  </a:txBody>
+                  <a:tcPr>
+                    <a:solidFill>
+                      <a:srgbClr val="1F2A44"/>
+                    </a:solidFill>
+                  </a:tcPr>
+                </a:tc>
+                <a:tc>
+                  <a:txBody>
+                    <a:bodyPr/>
+                    <a:lstStyle/>
+                    <a:p>
+                      <a:r>
+                        <a:rPr sz="2000" b="1">
+                          <a:solidFill>
+                            <a:srgbClr val="FBF7EF"/>
+                          </a:solidFill>
+                          <a:latin typeface="Fredoka"/>
+                        </a:rPr>
+                        <a:t>Pensar rápido</a:t>
+                      </a:r>
+                    </a:p>
+                  </a:txBody>
+                  <a:tcPr>
+                    <a:solidFill>
+                      <a:srgbClr val="1F2A44"/>
+                    </a:solidFill>
+                  </a:tcPr>
+                </a:tc>
+                <a:tc>
+                  <a:txBody>
+                    <a:bodyPr/>
+                    <a:lstStyle/>
+                    <a:p>
+                      <a:r>
+                        <a:rPr sz="2000" b="1">
+                          <a:solidFill>
+                            <a:srgbClr val="FBF7EF"/>
+                          </a:solidFill>
+                          <a:latin typeface="Fredoka"/>
+                        </a:rPr>
+                        <a:t>Pensar despacio</a:t>
+                      </a:r>
+                    </a:p>
+                  </a:txBody>
+                  <a:tcPr>
+                    <a:solidFill>
+                      <a:srgbClr val="1F2A44"/>
+                    </a:solidFill>
+                  </a:tcPr>
+                </a:tc>
+              </a:tr>
+              <a:tr h="600000">
+                <a:tc>
+                  <a:txBody>
+                    <a:bodyPr/>
+                    <a:lstStyle/>
+                    <a:p>
+                      <a:r>
+                        <a:rPr sz="2000" b="0">
+                          <a:solidFill>
+                            <a:srgbClr val="1F2A44"/>
+                          </a:solidFill>
+                          <a:latin typeface="Nunito Sans"/>
+                        </a:rPr>
+                        <a:t>Cómo es</a:t>
+                      </a:r>
+                    </a:p>
+                  </a:txBody>
+                  <a:tcPr>
+                    <a:solidFill>
+                      <a:srgbClr val="FFFFFF"/>
+                    </a:solidFill>
+                  </a:tcPr>
+                </a:tc>
+                <a:tc>
+                  <a:txBody>
+                    <a:bodyPr/>
+                    <a:lstStyle/>
+                    <a:p>
+                      <a:r>
+                        <a:rPr sz="2000" b="0">
+                          <a:solidFill>
+                            <a:srgbClr val="1F2A44"/>
+                          </a:solidFill>
+                          <a:latin typeface="Nunito Sans"/>
+                        </a:rPr>
+                        <a:t>Automático, sin esfuerzo</a:t>
+                      </a:r>
+                    </a:p>
+                  </a:txBody>
+                  <a:tcPr>
+                    <a:solidFill>
+                      <a:srgbClr val="FFFFFF"/>
+                    </a:solidFill>
+                  </a:tcPr>
+                </a:tc>
+                <a:tc>
+                  <a:txBody>
+                    <a:bodyPr/>
+                    <a:lstStyle/>
+                    <a:p>
+                      <a:r>
+                        <a:rPr sz="2000" b="0">
+                          <a:solidFill>
+                            <a:srgbClr val="1F2A44"/>
+                          </a:solidFill>
+                          <a:latin typeface="Nunito Sans"/>
+                        </a:rPr>
+                        <a:t>Lento, con esfuerzo</a:t>
+                      </a:r>
+                    </a:p>
+                  </a:txBody>
+                  <a:tcPr>
+                    <a:solidFill>
+                      <a:srgbClr val="FFFFFF"/>
+                    </a:solidFill>
+                  </a:tcPr>
+                </a:tc>
+              </a:tr>
+              <a:tr h="600000">
+                <a:tc>
+                  <a:txBody>
+                    <a:bodyPr/>
+                    <a:lstStyle/>
+                    <a:p>
+                      <a:r>
+                        <a:rPr sz="2000" b="0">
+                          <a:solidFill>
+                            <a:srgbClr val="1F2A44"/>
+                          </a:solidFill>
+                          <a:latin typeface="Nunito Sans"/>
+                        </a:rPr>
+                        <a:t>Ejemplo</a:t>
+                      </a:r>
+                    </a:p>
+                  </a:txBody>
+                  <a:tcPr>
+                    <a:solidFill>
+                      <a:srgbClr val="EAF0F7"/>
+                    </a:solidFill>
+                  </a:tcPr>
+                </a:tc>
+                <a:tc>
+                  <a:txBody>
+                    <a:bodyPr/>
+                    <a:lstStyle/>
+                    <a:p>
+                      <a:r>
+                        <a:rPr sz="2000" b="0">
+                          <a:solidFill>
+                            <a:srgbClr val="1F2A44"/>
+                          </a:solidFill>
+                          <a:latin typeface="Nunito Sans"/>
+                        </a:rPr>
+                        <a:t>Saber cuánto es 2 + 2</a:t>
+                      </a:r>
+                    </a:p>
+                  </a:txBody>
+                  <a:tcPr>
+                    <a:solidFill>
+                      <a:srgbClr val="EAF0F7"/>
+                    </a:solidFill>
+                  </a:tcPr>
+                </a:tc>
+                <a:tc>
+                  <a:txBody>
+                    <a:bodyPr/>
+                    <a:lstStyle/>
+                    <a:p>
+                      <a:r>
+                        <a:rPr sz="2000" b="0">
+                          <a:solidFill>
+                            <a:srgbClr val="1F2A44"/>
+                          </a:solidFill>
+                          <a:latin typeface="Nunito Sans"/>
+                        </a:rPr>
+                        <a:t>Calcular 17 × 24</a:t>
+                      </a:r>
+                    </a:p>
+                  </a:txBody>
+                  <a:tcPr>
+                    <a:solidFill>
+                      <a:srgbClr val="EAF0F7"/>
+                    </a:solidFill>
+                  </a:tcPr>
+                </a:tc>
+              </a:tr>
+              <a:tr h="600000">
+                <a:tc>
+                  <a:txBody>
+                    <a:bodyPr/>
+                    <a:lstStyle/>
+                    <a:p>
+                      <a:r>
+                        <a:rPr sz="2000" b="0">
+                          <a:solidFill>
+                            <a:srgbClr val="1F2A44"/>
+                          </a:solidFill>
+                          <a:latin typeface="Nunito Sans"/>
+                        </a:rPr>
+                        <a:t>Problema</a:t>
+                      </a:r>
+                    </a:p>
+                  </a:txBody>
+                  <a:tcPr>
+                    <a:solidFill>
+                      <a:srgbClr val="FFFFFF"/>
+                    </a:solidFill>
+                  </a:tcPr>
+                </a:tc>
+                <a:tc>
+                  <a:txBody>
+                    <a:bodyPr/>
+                    <a:lstStyle/>
+                    <a:p>
+                      <a:r>
+                        <a:rPr sz="2000" b="0">
+                          <a:solidFill>
+                            <a:srgbClr val="1F2A44"/>
+                          </a:solidFill>
+                          <a:latin typeface="Nunito Sans"/>
+                        </a:rPr>
+                        <a:t>Se equivoca en preguntas con trampa</a:t>
+                      </a:r>
+                    </a:p>
+                  </a:txBody>
+                  <a:tcPr>
+                    <a:solidFill>
+                      <a:srgbClr val="FFFFFF"/>
+                    </a:solidFill>
+                  </a:tcPr>
+                </a:tc>
+                <a:tc>
+                  <a:txBody>
+                    <a:bodyPr/>
+                    <a:lstStyle/>
+                    <a:p>
+                      <a:r>
+                        <a:rPr sz="2000" b="0">
+                          <a:solidFill>
+                            <a:srgbClr val="1F2A44"/>
+                          </a:solidFill>
+                          <a:latin typeface="Nunito Sans"/>
+                        </a:rPr>
+                        <a:t>Cansa: no lo usamos siempre</a:t>
+                      </a:r>
+                    </a:p>
+                  </a:txBody>
+                  <a:tcPr>
+                    <a:solidFill>
+                      <a:srgbClr val="FFFFFF"/>
+                    </a:solidFill>
+                  </a:tcPr>
+                </a:tc>
+              </a:tr>
+            </a:tbl>
+          </a:graphicData>
+        </a:graphic>
+      </p:graphicFrame>
     </p:spTree>
   </p:cSld>
   <p:clrMapOvr>
@@ -7749,7 +7648,7 @@
     <p:bg>
       <p:bgPr>
         <a:solidFill>
-          <a:srgbClr val="1F2A44"/>
+          <a:srgbClr val="FBF7EF"/>
         </a:solidFill>
         <a:effectLst/>
       </p:bgPr>
@@ -7769,8 +7668,8 @@
         </p:nvSpPr>
         <p:spPr>
           <a:xfrm>
-            <a:off x="640000" y="2300000"/>
-            <a:ext cx="10912000" cy="500000"/>
+            <a:off x="640000" y="380000"/>
+            <a:ext cx="10912000" cy="420000"/>
           </a:xfrm>
           <a:prstGeom prst="rect">
             <a:avLst/>
@@ -7785,17 +7684,17 @@
           <a:p>
             <a:pPr>
               <a:spcAft>
-                <a:spcPts val="810"/>
-              </a:spcAft>
-            </a:pPr>
-            <a:r>
-              <a:rPr sz="1800" b="1">
-                <a:solidFill>
-                  <a:srgbClr val="F4B183"/>
-                </a:solidFill>
-                <a:latin typeface="Nunito Sans"/>
-              </a:rPr>
-              <a:t>BLOQUE 2</a:t>
+                <a:spcPts val="630"/>
+              </a:spcAft>
+            </a:pPr>
+            <a:r>
+              <a:rPr sz="1400" b="1">
+                <a:solidFill>
+                  <a:srgbClr val="E8793A"/>
+                </a:solidFill>
+                <a:latin typeface="Nunito Sans"/>
+              </a:rPr>
+              <a:t>BLOQUE 1 · ATAJOS QUE FALLAN</a:t>
             </a:r>
           </a:p>
         </p:txBody>
@@ -7808,7 +7707,7 @@
         </p:nvSpPr>
         <p:spPr>
           <a:xfrm>
-            <a:off x="640000" y="2800000"/>
+            <a:off x="640000" y="760000"/>
             <a:ext cx="10912000" cy="800000"/>
           </a:xfrm>
           <a:prstGeom prst="rect">
@@ -7824,17 +7723,158 @@
           <a:p>
             <a:pPr>
               <a:spcAft>
-                <a:spcPts val="2160"/>
-              </a:spcAft>
-            </a:pPr>
-            <a:r>
-              <a:rPr sz="4800" b="1">
-                <a:solidFill>
-                  <a:srgbClr val="FBF7EF"/>
+                <a:spcPts val="1710"/>
+              </a:spcAft>
+            </a:pPr>
+            <a:r>
+              <a:rPr sz="3800" b="1">
+                <a:solidFill>
+                  <a:srgbClr val="1F2A44"/>
                 </a:solidFill>
                 <a:latin typeface="Fredoka"/>
               </a:rPr>
-              <a:t>Casos resueltos</a:t>
+              <a:t>¿Por qué tenemos atajos?</a:t>
+            </a:r>
+          </a:p>
+        </p:txBody>
+      </p:sp>
+      <p:sp>
+        <p:nvSpPr>
+          <p:cNvPr id="4" name="TextBox 3"/>
+          <p:cNvSpPr txBox="1"/>
+          <p:nvPr/>
+        </p:nvSpPr>
+        <p:spPr>
+          <a:xfrm>
+            <a:off x="640000" y="1650000"/>
+            <a:ext cx="10912000" cy="4808000"/>
+          </a:xfrm>
+          <a:prstGeom prst="rect">
+            <a:avLst/>
+          </a:prstGeom>
+          <a:noFill/>
+        </p:spPr>
+        <p:txBody>
+          <a:bodyPr wrap="square">
+            <a:spAutoFit/>
+          </a:bodyPr>
+          <a:lstStyle/>
+          <a:p>
+            <a:pPr>
+              <a:spcAft>
+                <a:spcPts val="1260"/>
+              </a:spcAft>
+            </a:pPr>
+            <a:r>
+              <a:rPr sz="2800" b="1">
+                <a:solidFill>
+                  <a:srgbClr val="E8793A"/>
+                </a:solidFill>
+                <a:latin typeface="Nunito Sans"/>
+              </a:rPr>
+              <a:t>• </a:t>
+            </a:r>
+            <a:r>
+              <a:rPr sz="2800" b="0">
+                <a:solidFill>
+                  <a:srgbClr val="1F2A44"/>
+                </a:solidFill>
+                <a:latin typeface="Nunito Sans"/>
+              </a:rPr>
+              <a:t>Cada día tomamos muchísimas decisiones</a:t>
+            </a:r>
+          </a:p>
+          <a:p>
+            <a:pPr>
+              <a:spcAft>
+                <a:spcPts val="1260"/>
+              </a:spcAft>
+            </a:pPr>
+            <a:r>
+              <a:rPr sz="2800" b="1">
+                <a:solidFill>
+                  <a:srgbClr val="E8793A"/>
+                </a:solidFill>
+                <a:latin typeface="Nunito Sans"/>
+              </a:rPr>
+              <a:t>• </a:t>
+            </a:r>
+            <a:r>
+              <a:rPr sz="2800" b="0">
+                <a:solidFill>
+                  <a:srgbClr val="1F2A44"/>
+                </a:solidFill>
+                <a:latin typeface="Nunito Sans"/>
+              </a:rPr>
+              <a:t>Pensarlo todo despacio sería agotador</a:t>
+            </a:r>
+          </a:p>
+          <a:p>
+            <a:pPr>
+              <a:spcAft>
+                <a:spcPts val="1260"/>
+              </a:spcAft>
+            </a:pPr>
+            <a:r>
+              <a:rPr sz="2800" b="1">
+                <a:solidFill>
+                  <a:srgbClr val="E8793A"/>
+                </a:solidFill>
+                <a:latin typeface="Nunito Sans"/>
+              </a:rPr>
+              <a:t>• </a:t>
+            </a:r>
+            <a:r>
+              <a:rPr sz="2800" b="0">
+                <a:solidFill>
+                  <a:srgbClr val="1F2A44"/>
+                </a:solidFill>
+                <a:latin typeface="Nunito Sans"/>
+              </a:rPr>
+              <a:t>Casi siempre los atajos aciertan: son útiles</a:t>
+            </a:r>
+          </a:p>
+          <a:p>
+            <a:pPr>
+              <a:spcAft>
+                <a:spcPts val="1260"/>
+              </a:spcAft>
+            </a:pPr>
+            <a:r>
+              <a:rPr sz="2800" b="1">
+                <a:solidFill>
+                  <a:srgbClr val="E8793A"/>
+                </a:solidFill>
+                <a:latin typeface="Nunito Sans"/>
+              </a:rPr>
+              <a:t>• </a:t>
+            </a:r>
+            <a:r>
+              <a:rPr sz="2800" b="0">
+                <a:solidFill>
+                  <a:srgbClr val="1F2A44"/>
+                </a:solidFill>
+                <a:latin typeface="Nunito Sans"/>
+              </a:rPr>
+              <a:t>Pero en ciertas situaciones fallan </a:t>
+            </a:r>
+            <a:r>
+              <a:rPr sz="2800" b="1">
+                <a:solidFill>
+                  <a:srgbClr val="1F2A44"/>
+                </a:solidFill>
+                <a:latin typeface="Nunito Sans"/>
+              </a:rPr>
+              <a:t>siempre hacia el mismo lado</a:t>
+            </a:r>
+            <a:r>
+              <a:rPr sz="2800" b="0">
+                <a:solidFill>
+                  <a:srgbClr val="1F2A44"/>
+                </a:solidFill>
+                <a:latin typeface="Nunito Sans"/>
+              </a:rPr>
+              <a:t>: eso es un sesgo</a:t>
             </a:r>
           </a:p>
         </p:txBody>
